--- a/public/lessons/year-6-maths/autumn/week-6/use-multiplication-and-division-before-addition-and-subtraction/teaching-powerpoint-v1.pptx
+++ b/public/lessons/year-6-maths/autumn/week-6/use-multiplication-and-division-before-addition-and-subtraction/teaching-powerpoint-v1.pptx
@@ -2,24 +2,24 @@
 <file path=ppt/presentation.xml><?xml version="1.0" encoding="utf-8"?>
 <p:presentation xmlns:p="http://schemas.openxmlformats.org/presentationml/2006/main">
   <p:sldMasterIdLst>
-    <p:sldMasterId xmlns:r="http://schemas.openxmlformats.org/officeDocument/2006/relationships" id="2147483648" r:id="R47a32e57f96a43b2"/>
+    <p:sldMasterId xmlns:r="http://schemas.openxmlformats.org/officeDocument/2006/relationships" id="2147483648" r:id="R8570c98acb9f49ac"/>
   </p:sldMasterIdLst>
   <p:notesMasterIdLst>
-    <p:notesMasterId xmlns:r="http://schemas.openxmlformats.org/officeDocument/2006/relationships" r:id="R901a4853a9354a0a"/>
+    <p:notesMasterId xmlns:r="http://schemas.openxmlformats.org/officeDocument/2006/relationships" r:id="Rf0ec5c0971a24259"/>
   </p:notesMasterIdLst>
   <p:sldIdLst>
-    <p:sldId xmlns:r="http://schemas.openxmlformats.org/officeDocument/2006/relationships" id="256" r:id="Ra1b8351b26be438e"/>
-    <p:sldId xmlns:r="http://schemas.openxmlformats.org/officeDocument/2006/relationships" id="257" r:id="Rfc88b1bf0da248f1"/>
-    <p:sldId xmlns:r="http://schemas.openxmlformats.org/officeDocument/2006/relationships" id="258" r:id="R060212017a2d4e15"/>
-    <p:sldId xmlns:r="http://schemas.openxmlformats.org/officeDocument/2006/relationships" id="259" r:id="R5edab88e62684d46"/>
-    <p:sldId xmlns:r="http://schemas.openxmlformats.org/officeDocument/2006/relationships" id="260" r:id="R5aedce61accf4ad1"/>
-    <p:sldId xmlns:r="http://schemas.openxmlformats.org/officeDocument/2006/relationships" id="261" r:id="R991bee1cf5284026"/>
-    <p:sldId xmlns:r="http://schemas.openxmlformats.org/officeDocument/2006/relationships" id="262" r:id="Rf16ab65f050e43c7"/>
-    <p:sldId xmlns:r="http://schemas.openxmlformats.org/officeDocument/2006/relationships" id="263" r:id="R5823aa98f2bb42f0"/>
-    <p:sldId xmlns:r="http://schemas.openxmlformats.org/officeDocument/2006/relationships" id="264" r:id="Rf67c6a547dcc4e73"/>
-    <p:sldId xmlns:r="http://schemas.openxmlformats.org/officeDocument/2006/relationships" id="265" r:id="R618b1b41d37d419e"/>
-    <p:sldId xmlns:r="http://schemas.openxmlformats.org/officeDocument/2006/relationships" id="266" r:id="R4844aca27ec144d7"/>
-    <p:sldId xmlns:r="http://schemas.openxmlformats.org/officeDocument/2006/relationships" id="267" r:id="R4b49c9cf7c1044d8"/>
+    <p:sldId xmlns:r="http://schemas.openxmlformats.org/officeDocument/2006/relationships" id="256" r:id="Rf370f40b1ede406e"/>
+    <p:sldId xmlns:r="http://schemas.openxmlformats.org/officeDocument/2006/relationships" id="257" r:id="R154add884de34a58"/>
+    <p:sldId xmlns:r="http://schemas.openxmlformats.org/officeDocument/2006/relationships" id="258" r:id="R373265d0fe9c4541"/>
+    <p:sldId xmlns:r="http://schemas.openxmlformats.org/officeDocument/2006/relationships" id="259" r:id="R386d62a6f9954f7a"/>
+    <p:sldId xmlns:r="http://schemas.openxmlformats.org/officeDocument/2006/relationships" id="260" r:id="Re3fb7d53eefb4f10"/>
+    <p:sldId xmlns:r="http://schemas.openxmlformats.org/officeDocument/2006/relationships" id="261" r:id="R467f55cec5a04c46"/>
+    <p:sldId xmlns:r="http://schemas.openxmlformats.org/officeDocument/2006/relationships" id="262" r:id="Rbd5c33cc0f0d4586"/>
+    <p:sldId xmlns:r="http://schemas.openxmlformats.org/officeDocument/2006/relationships" id="263" r:id="Rbe72860ed9a94b5f"/>
+    <p:sldId xmlns:r="http://schemas.openxmlformats.org/officeDocument/2006/relationships" id="264" r:id="R55e7ced1f1c64e7f"/>
+    <p:sldId xmlns:r="http://schemas.openxmlformats.org/officeDocument/2006/relationships" id="265" r:id="R788b41eb48874a4d"/>
+    <p:sldId xmlns:r="http://schemas.openxmlformats.org/officeDocument/2006/relationships" id="266" r:id="R68b4b5498b754927"/>
+    <p:sldId xmlns:r="http://schemas.openxmlformats.org/officeDocument/2006/relationships" id="267" r:id="R5f0b9154e1ca41e6"/>
   </p:sldIdLst>
   <p:sldSz cx="12192000" cy="6858000"/>
   <p:notesSz cx="6858000" cy="9144000"/>
@@ -873,7 +873,7 @@
           <a:lstStyle xmlns:a="http://schemas.openxmlformats.org/drawingml/2006/main"/>
           <a:p xmlns:a="http://schemas.openxmlformats.org/drawingml/2006/main">
             <a:r>
-              <a:t>I do. Reveal the question, setup and each calculation stage one click at a time. Pupils watch before copying. Model answer: 60.</a:t>
+              <a:t>I do. Reveal the question, then reveal each mathematical change one click at a time. Point to the numbers and operation that changed before moving to the next line. Final answer: 60.</a:t>
             </a:r>
           </a:p>
         </p:txBody>
@@ -1291,7 +1291,7 @@
   </p:cSld>
   <p:clrMap bg1="lt1" tx1="dk1" bg2="lt2" tx2="dk2" accent1="accent1" accent2="accent2" accent3="accent3" accent4="accent4" accent5="accent5" accent6="accent6" hlink="hlink" folHlink="folHlink"/>
   <p:sldLayoutIdLst>
-    <p:sldLayoutId xmlns:r="http://schemas.openxmlformats.org/officeDocument/2006/relationships" id="2147483649" r:id="R5954b8dd0c9a43ef"/>
+    <p:sldLayoutId xmlns:r="http://schemas.openxmlformats.org/officeDocument/2006/relationships" id="2147483649" r:id="Rf30172cd268d4d5d"/>
   </p:sldLayoutIdLst>
   <p:txStyles>
     <p:titleStyle>
@@ -1842,7 +1842,7 @@
           <p:cNvPr id="12" name="">
             <a:extLst xmlns:a="http://schemas.openxmlformats.org/drawingml/2006/main">
               <a:ext uri="{FF2B5EF4-FFF2-40B4-BE49-F238E27FC236}">
-                <a16:creationId xmlns:a16="http://schemas.microsoft.com/office/drawing/2014/main" id="{B97B62BA-CA86-4FB6-9A46-0E9DB36B5A2B}"/>
+                <a16:creationId xmlns:a16="http://schemas.microsoft.com/office/drawing/2014/main" id="{A09FE13A-D66F-4377-A1DD-154966F85496}"/>
               </a:ext>
             </a:extLst>
           </p:cNvPr>
@@ -1874,7 +1874,7 @@
           <p:cNvPr id="2" name="">
             <a:extLst xmlns:a="http://schemas.openxmlformats.org/drawingml/2006/main">
               <a:ext uri="{FF2B5EF4-FFF2-40B4-BE49-F238E27FC236}">
-                <a16:creationId xmlns:a16="http://schemas.microsoft.com/office/drawing/2014/main" id="{472FD209-3C47-4AD4-BAD7-E150E689544E}"/>
+                <a16:creationId xmlns:a16="http://schemas.microsoft.com/office/drawing/2014/main" id="{203B589A-F334-409E-83E2-B8AB0350A2B4}"/>
               </a:ext>
             </a:extLst>
           </p:cNvPr>
@@ -1931,7 +1931,7 @@
           <p:cNvPr id="3" name="">
             <a:extLst xmlns:a="http://schemas.openxmlformats.org/drawingml/2006/main">
               <a:ext uri="{FF2B5EF4-FFF2-40B4-BE49-F238E27FC236}">
-                <a16:creationId xmlns:a16="http://schemas.microsoft.com/office/drawing/2014/main" id="{EA9392C7-0F04-4436-AF8F-B682F0616AD6}"/>
+                <a16:creationId xmlns:a16="http://schemas.microsoft.com/office/drawing/2014/main" id="{05EA6D39-E5DF-4336-893F-0866EA8D6D2A}"/>
               </a:ext>
             </a:extLst>
           </p:cNvPr>
@@ -1965,7 +1965,7 @@
           <p:cNvPr id="4" name="">
             <a:extLst xmlns:a="http://schemas.openxmlformats.org/drawingml/2006/main">
               <a:ext uri="{FF2B5EF4-FFF2-40B4-BE49-F238E27FC236}">
-                <a16:creationId xmlns:a16="http://schemas.microsoft.com/office/drawing/2014/main" id="{AD192C4C-0664-4661-BFF0-77731544291C}"/>
+                <a16:creationId xmlns:a16="http://schemas.microsoft.com/office/drawing/2014/main" id="{FB190894-A63F-43C0-976C-34DBFB59B6BE}"/>
               </a:ext>
             </a:extLst>
           </p:cNvPr>
@@ -2022,7 +2022,7 @@
           <p:cNvPr id="5" name="">
             <a:extLst xmlns:a="http://schemas.openxmlformats.org/drawingml/2006/main">
               <a:ext uri="{FF2B5EF4-FFF2-40B4-BE49-F238E27FC236}">
-                <a16:creationId xmlns:a16="http://schemas.microsoft.com/office/drawing/2014/main" id="{736DBE71-075A-4F47-832E-EFC952BCFB7A}"/>
+                <a16:creationId xmlns:a16="http://schemas.microsoft.com/office/drawing/2014/main" id="{6E5052FD-1102-40C5-BA3D-8B09D0622980}"/>
               </a:ext>
             </a:extLst>
           </p:cNvPr>
@@ -2079,7 +2079,7 @@
           <p:cNvPr id="6" name="">
             <a:extLst xmlns:a="http://schemas.openxmlformats.org/drawingml/2006/main">
               <a:ext uri="{FF2B5EF4-FFF2-40B4-BE49-F238E27FC236}">
-                <a16:creationId xmlns:a16="http://schemas.microsoft.com/office/drawing/2014/main" id="{98EEC246-933C-4A59-94A7-8974E02704AB}"/>
+                <a16:creationId xmlns:a16="http://schemas.microsoft.com/office/drawing/2014/main" id="{C88F01AA-EAED-4C39-AC11-5C60F3BFF111}"/>
               </a:ext>
             </a:extLst>
           </p:cNvPr>
@@ -2113,7 +2113,7 @@
           <p:cNvPr id="7" name="">
             <a:extLst xmlns:a="http://schemas.openxmlformats.org/drawingml/2006/main">
               <a:ext uri="{FF2B5EF4-FFF2-40B4-BE49-F238E27FC236}">
-                <a16:creationId xmlns:a16="http://schemas.microsoft.com/office/drawing/2014/main" id="{3C4923ED-F9D2-416F-9737-7E8497418A18}"/>
+                <a16:creationId xmlns:a16="http://schemas.microsoft.com/office/drawing/2014/main" id="{B619C228-4401-4335-A219-D8D95CDB878F}"/>
               </a:ext>
             </a:extLst>
           </p:cNvPr>
@@ -2170,7 +2170,7 @@
           <p:cNvPr id="8" name="">
             <a:extLst xmlns:a="http://schemas.openxmlformats.org/drawingml/2006/main">
               <a:ext uri="{FF2B5EF4-FFF2-40B4-BE49-F238E27FC236}">
-                <a16:creationId xmlns:a16="http://schemas.microsoft.com/office/drawing/2014/main" id="{0D13283C-6B01-40AF-A885-8A6D59C1BEFD}"/>
+                <a16:creationId xmlns:a16="http://schemas.microsoft.com/office/drawing/2014/main" id="{58C2D382-8DFD-4E84-B63B-529C08E310F9}"/>
               </a:ext>
             </a:extLst>
           </p:cNvPr>
@@ -2227,7 +2227,7 @@
           <p:cNvPr id="9" name="">
             <a:extLst xmlns:a="http://schemas.openxmlformats.org/drawingml/2006/main">
               <a:ext uri="{FF2B5EF4-FFF2-40B4-BE49-F238E27FC236}">
-                <a16:creationId xmlns:a16="http://schemas.microsoft.com/office/drawing/2014/main" id="{CB5407C4-14BB-4D8F-A18F-FF2E784921A6}"/>
+                <a16:creationId xmlns:a16="http://schemas.microsoft.com/office/drawing/2014/main" id="{CAB0A4EC-7530-4676-9E61-79CD89B45B85}"/>
               </a:ext>
             </a:extLst>
           </p:cNvPr>
@@ -2284,7 +2284,7 @@
           <p:cNvPr id="10" name="">
             <a:extLst xmlns:a="http://schemas.openxmlformats.org/drawingml/2006/main">
               <a:ext uri="{FF2B5EF4-FFF2-40B4-BE49-F238E27FC236}">
-                <a16:creationId xmlns:a16="http://schemas.microsoft.com/office/drawing/2014/main" id="{1243574F-42BC-4F60-BA8D-0E690A6C6737}"/>
+                <a16:creationId xmlns:a16="http://schemas.microsoft.com/office/drawing/2014/main" id="{8489BDE3-5DAF-4BBE-8E1A-79D602EB6AFC}"/>
               </a:ext>
             </a:extLst>
           </p:cNvPr>
@@ -2341,7 +2341,7 @@
           <p:cNvPr id="11" name="">
             <a:extLst xmlns:a="http://schemas.openxmlformats.org/drawingml/2006/main">
               <a:ext uri="{FF2B5EF4-FFF2-40B4-BE49-F238E27FC236}">
-                <a16:creationId xmlns:a16="http://schemas.microsoft.com/office/drawing/2014/main" id="{659B67FE-C8E0-47B2-862F-409B3357501C}"/>
+                <a16:creationId xmlns:a16="http://schemas.microsoft.com/office/drawing/2014/main" id="{90A56764-5279-42D2-BB8E-B0260140B287}"/>
               </a:ext>
             </a:extLst>
           </p:cNvPr>
@@ -2396,7 +2396,7 @@
     </p:spTree>
     <p:extLst>
       <p:ext uri="{BB962C8B-B14F-4D97-AF65-F5344CB8AC3E}">
-        <p14:creationId xmlns:p14="http://schemas.microsoft.com/office/powerpoint/2010/main" val="1127398498"/>
+        <p14:creationId xmlns:p14="http://schemas.microsoft.com/office/powerpoint/2010/main" val="26960513"/>
       </p:ext>
     </p:extLst>
   </p:cSld>
@@ -2427,7 +2427,7 @@
           <p:cNvPr id="14" name="">
             <a:extLst xmlns:a="http://schemas.openxmlformats.org/drawingml/2006/main">
               <a:ext uri="{FF2B5EF4-FFF2-40B4-BE49-F238E27FC236}">
-                <a16:creationId xmlns:a16="http://schemas.microsoft.com/office/drawing/2014/main" id="{81D07040-BB51-46C2-AC89-9E2BE7E0E757}"/>
+                <a16:creationId xmlns:a16="http://schemas.microsoft.com/office/drawing/2014/main" id="{C2FD2329-358E-4178-A1F9-59DCB26EECCB}"/>
               </a:ext>
             </a:extLst>
           </p:cNvPr>
@@ -2459,7 +2459,7 @@
           <p:cNvPr id="2" name="">
             <a:extLst xmlns:a="http://schemas.openxmlformats.org/drawingml/2006/main">
               <a:ext uri="{FF2B5EF4-FFF2-40B4-BE49-F238E27FC236}">
-                <a16:creationId xmlns:a16="http://schemas.microsoft.com/office/drawing/2014/main" id="{A0E613F3-313B-4570-BAC6-BA941EC0669E}"/>
+                <a16:creationId xmlns:a16="http://schemas.microsoft.com/office/drawing/2014/main" id="{E28CF73D-47EA-4308-87D3-DC0659ABA0F0}"/>
               </a:ext>
             </a:extLst>
           </p:cNvPr>
@@ -2516,7 +2516,7 @@
           <p:cNvPr id="3" name="">
             <a:extLst xmlns:a="http://schemas.openxmlformats.org/drawingml/2006/main">
               <a:ext uri="{FF2B5EF4-FFF2-40B4-BE49-F238E27FC236}">
-                <a16:creationId xmlns:a16="http://schemas.microsoft.com/office/drawing/2014/main" id="{A6719AB1-8649-469E-B1A4-86A17472E1A1}"/>
+                <a16:creationId xmlns:a16="http://schemas.microsoft.com/office/drawing/2014/main" id="{7ABF3A8D-E33C-4425-9EE8-8ABAEEAC2DDD}"/>
               </a:ext>
             </a:extLst>
           </p:cNvPr>
@@ -2548,7 +2548,7 @@
           <p:cNvPr id="4" name="">
             <a:extLst xmlns:a="http://schemas.openxmlformats.org/drawingml/2006/main">
               <a:ext uri="{FF2B5EF4-FFF2-40B4-BE49-F238E27FC236}">
-                <a16:creationId xmlns:a16="http://schemas.microsoft.com/office/drawing/2014/main" id="{2BFA6167-4FBA-4D99-92E6-591419E0F990}"/>
+                <a16:creationId xmlns:a16="http://schemas.microsoft.com/office/drawing/2014/main" id="{D467C451-050F-4958-96CE-8812E7FD336D}"/>
               </a:ext>
             </a:extLst>
           </p:cNvPr>
@@ -2605,7 +2605,7 @@
           <p:cNvPr id="5" name="">
             <a:extLst xmlns:a="http://schemas.openxmlformats.org/drawingml/2006/main">
               <a:ext uri="{FF2B5EF4-FFF2-40B4-BE49-F238E27FC236}">
-                <a16:creationId xmlns:a16="http://schemas.microsoft.com/office/drawing/2014/main" id="{64F172C1-A036-438D-85D9-4FF8D2730889}"/>
+                <a16:creationId xmlns:a16="http://schemas.microsoft.com/office/drawing/2014/main" id="{0EDB6A57-199A-47F8-BE3F-2020657B99C6}"/>
               </a:ext>
             </a:extLst>
           </p:cNvPr>
@@ -2662,7 +2662,7 @@
           <p:cNvPr id="6" name="">
             <a:extLst xmlns:a="http://schemas.openxmlformats.org/drawingml/2006/main">
               <a:ext uri="{FF2B5EF4-FFF2-40B4-BE49-F238E27FC236}">
-                <a16:creationId xmlns:a16="http://schemas.microsoft.com/office/drawing/2014/main" id="{A7AE2B64-52AD-4064-AA03-23E1B8EFB293}"/>
+                <a16:creationId xmlns:a16="http://schemas.microsoft.com/office/drawing/2014/main" id="{97E862BC-47E8-4908-8249-90EEE6D2B4B0}"/>
               </a:ext>
             </a:extLst>
           </p:cNvPr>
@@ -2719,7 +2719,7 @@
           <p:cNvPr id="7" name="">
             <a:extLst xmlns:a="http://schemas.openxmlformats.org/drawingml/2006/main">
               <a:ext uri="{FF2B5EF4-FFF2-40B4-BE49-F238E27FC236}">
-                <a16:creationId xmlns:a16="http://schemas.microsoft.com/office/drawing/2014/main" id="{D32FF0F5-15D4-47C2-A71B-454BFB450E59}"/>
+                <a16:creationId xmlns:a16="http://schemas.microsoft.com/office/drawing/2014/main" id="{13901E4E-8133-47CA-ACC7-BFF04AE48F90}"/>
               </a:ext>
             </a:extLst>
           </p:cNvPr>
@@ -2751,7 +2751,7 @@
           <p:cNvPr id="8" name="">
             <a:extLst xmlns:a="http://schemas.openxmlformats.org/drawingml/2006/main">
               <a:ext uri="{FF2B5EF4-FFF2-40B4-BE49-F238E27FC236}">
-                <a16:creationId xmlns:a16="http://schemas.microsoft.com/office/drawing/2014/main" id="{5D81601F-84A6-44FE-8EAC-786BD2A6A6F6}"/>
+                <a16:creationId xmlns:a16="http://schemas.microsoft.com/office/drawing/2014/main" id="{C1AB621F-8146-44A3-AB63-1999B8D157DC}"/>
               </a:ext>
             </a:extLst>
           </p:cNvPr>
@@ -2808,7 +2808,7 @@
           <p:cNvPr id="9" name="">
             <a:extLst xmlns:a="http://schemas.openxmlformats.org/drawingml/2006/main">
               <a:ext uri="{FF2B5EF4-FFF2-40B4-BE49-F238E27FC236}">
-                <a16:creationId xmlns:a16="http://schemas.microsoft.com/office/drawing/2014/main" id="{890D5E0B-CDF7-4C05-BCA8-146893225733}"/>
+                <a16:creationId xmlns:a16="http://schemas.microsoft.com/office/drawing/2014/main" id="{FD73E17D-2E68-4665-8A05-72019634CB77}"/>
               </a:ext>
             </a:extLst>
           </p:cNvPr>
@@ -2865,7 +2865,7 @@
           <p:cNvPr id="10" name="">
             <a:extLst xmlns:a="http://schemas.openxmlformats.org/drawingml/2006/main">
               <a:ext uri="{FF2B5EF4-FFF2-40B4-BE49-F238E27FC236}">
-                <a16:creationId xmlns:a16="http://schemas.microsoft.com/office/drawing/2014/main" id="{8DDADB37-8D7D-4567-9CE3-2F2362081E84}"/>
+                <a16:creationId xmlns:a16="http://schemas.microsoft.com/office/drawing/2014/main" id="{C22075C1-8771-418F-8B21-72F97174869F}"/>
               </a:ext>
             </a:extLst>
           </p:cNvPr>
@@ -2922,7 +2922,7 @@
           <p:cNvPr id="11" name="">
             <a:extLst xmlns:a="http://schemas.openxmlformats.org/drawingml/2006/main">
               <a:ext uri="{FF2B5EF4-FFF2-40B4-BE49-F238E27FC236}">
-                <a16:creationId xmlns:a16="http://schemas.microsoft.com/office/drawing/2014/main" id="{96EDCEC7-A3AA-475B-8300-094573AC58A8}"/>
+                <a16:creationId xmlns:a16="http://schemas.microsoft.com/office/drawing/2014/main" id="{E0943D80-003D-49DE-B9E3-0F5AB6B8AA44}"/>
               </a:ext>
             </a:extLst>
           </p:cNvPr>
@@ -2979,7 +2979,7 @@
           <p:cNvPr id="12" name="">
             <a:extLst xmlns:a="http://schemas.openxmlformats.org/drawingml/2006/main">
               <a:ext uri="{FF2B5EF4-FFF2-40B4-BE49-F238E27FC236}">
-                <a16:creationId xmlns:a16="http://schemas.microsoft.com/office/drawing/2014/main" id="{1FDA1F9B-3D74-42B9-9A93-7F996099AB12}"/>
+                <a16:creationId xmlns:a16="http://schemas.microsoft.com/office/drawing/2014/main" id="{A7C95A6B-A0D6-452D-8F89-333457A6E988}"/>
               </a:ext>
             </a:extLst>
           </p:cNvPr>
@@ -3036,7 +3036,7 @@
           <p:cNvPr id="13" name="">
             <a:extLst xmlns:a="http://schemas.openxmlformats.org/drawingml/2006/main">
               <a:ext uri="{FF2B5EF4-FFF2-40B4-BE49-F238E27FC236}">
-                <a16:creationId xmlns:a16="http://schemas.microsoft.com/office/drawing/2014/main" id="{984014F4-89FD-4F47-AB5A-99EE50083E2B}"/>
+                <a16:creationId xmlns:a16="http://schemas.microsoft.com/office/drawing/2014/main" id="{0350CA10-7CAA-4AC3-85ED-7F1152093ABA}"/>
               </a:ext>
             </a:extLst>
           </p:cNvPr>
@@ -3091,7 +3091,7 @@
     </p:spTree>
     <p:extLst>
       <p:ext uri="{BB962C8B-B14F-4D97-AF65-F5344CB8AC3E}">
-        <p14:creationId xmlns:p14="http://schemas.microsoft.com/office/powerpoint/2010/main" val="1855523303"/>
+        <p14:creationId xmlns:p14="http://schemas.microsoft.com/office/powerpoint/2010/main" val="2091812385"/>
       </p:ext>
     </p:extLst>
   </p:cSld>
@@ -3292,7 +3292,7 @@
           <p:cNvPr id="19" name="">
             <a:extLst xmlns:a="http://schemas.openxmlformats.org/drawingml/2006/main">
               <a:ext uri="{FF2B5EF4-FFF2-40B4-BE49-F238E27FC236}">
-                <a16:creationId xmlns:a16="http://schemas.microsoft.com/office/drawing/2014/main" id="{6AFE7925-9744-4D70-8714-1688B568F136}"/>
+                <a16:creationId xmlns:a16="http://schemas.microsoft.com/office/drawing/2014/main" id="{6FD88954-6249-4CF1-89FE-28FA9F7809B9}"/>
               </a:ext>
             </a:extLst>
           </p:cNvPr>
@@ -3324,7 +3324,7 @@
           <p:cNvPr id="2" name="">
             <a:extLst xmlns:a="http://schemas.openxmlformats.org/drawingml/2006/main">
               <a:ext uri="{FF2B5EF4-FFF2-40B4-BE49-F238E27FC236}">
-                <a16:creationId xmlns:a16="http://schemas.microsoft.com/office/drawing/2014/main" id="{7168F6C7-9A60-45EE-B090-052461635E5A}"/>
+                <a16:creationId xmlns:a16="http://schemas.microsoft.com/office/drawing/2014/main" id="{B4B6E8EB-A3BC-4097-9B44-FC2E7201999D}"/>
               </a:ext>
             </a:extLst>
           </p:cNvPr>
@@ -3381,7 +3381,7 @@
           <p:cNvPr id="3" name="">
             <a:extLst xmlns:a="http://schemas.openxmlformats.org/drawingml/2006/main">
               <a:ext uri="{FF2B5EF4-FFF2-40B4-BE49-F238E27FC236}">
-                <a16:creationId xmlns:a16="http://schemas.microsoft.com/office/drawing/2014/main" id="{6A8ABF4C-64C9-48A2-AD45-092550895872}"/>
+                <a16:creationId xmlns:a16="http://schemas.microsoft.com/office/drawing/2014/main" id="{046111B9-B84E-4F74-939D-60EBADA3E337}"/>
               </a:ext>
             </a:extLst>
           </p:cNvPr>
@@ -3413,7 +3413,7 @@
           <p:cNvPr id="4" name="">
             <a:extLst xmlns:a="http://schemas.openxmlformats.org/drawingml/2006/main">
               <a:ext uri="{FF2B5EF4-FFF2-40B4-BE49-F238E27FC236}">
-                <a16:creationId xmlns:a16="http://schemas.microsoft.com/office/drawing/2014/main" id="{497AABB2-6278-4A2D-AA2F-CA8546CAADBA}"/>
+                <a16:creationId xmlns:a16="http://schemas.microsoft.com/office/drawing/2014/main" id="{1D98D1B0-D3DA-46D8-A4C2-9EDF168ADE2A}"/>
               </a:ext>
             </a:extLst>
           </p:cNvPr>
@@ -3470,7 +3470,7 @@
           <p:cNvPr id="5" name="">
             <a:extLst xmlns:a="http://schemas.openxmlformats.org/drawingml/2006/main">
               <a:ext uri="{FF2B5EF4-FFF2-40B4-BE49-F238E27FC236}">
-                <a16:creationId xmlns:a16="http://schemas.microsoft.com/office/drawing/2014/main" id="{235C3857-8F55-4B6B-BA9B-1ED9D2A40541}"/>
+                <a16:creationId xmlns:a16="http://schemas.microsoft.com/office/drawing/2014/main" id="{996204A1-207B-4331-91DE-314DD830E76D}"/>
               </a:ext>
             </a:extLst>
           </p:cNvPr>
@@ -3527,7 +3527,7 @@
           <p:cNvPr id="6" name="">
             <a:extLst xmlns:a="http://schemas.openxmlformats.org/drawingml/2006/main">
               <a:ext uri="{FF2B5EF4-FFF2-40B4-BE49-F238E27FC236}">
-                <a16:creationId xmlns:a16="http://schemas.microsoft.com/office/drawing/2014/main" id="{E28FB80D-5BDC-48C2-A952-AA17272211E5}"/>
+                <a16:creationId xmlns:a16="http://schemas.microsoft.com/office/drawing/2014/main" id="{1396EBCD-AA50-4C37-A460-52378F414538}"/>
               </a:ext>
             </a:extLst>
           </p:cNvPr>
@@ -3584,7 +3584,7 @@
           <p:cNvPr id="7" name="">
             <a:extLst xmlns:a="http://schemas.openxmlformats.org/drawingml/2006/main">
               <a:ext uri="{FF2B5EF4-FFF2-40B4-BE49-F238E27FC236}">
-                <a16:creationId xmlns:a16="http://schemas.microsoft.com/office/drawing/2014/main" id="{1AA16EAF-01FF-48A4-B182-6B55BB3A522B}"/>
+                <a16:creationId xmlns:a16="http://schemas.microsoft.com/office/drawing/2014/main" id="{5EB7798A-F059-49D8-87FA-7CDBCE2FF5F9}"/>
               </a:ext>
             </a:extLst>
           </p:cNvPr>
@@ -3616,7 +3616,7 @@
           <p:cNvPr id="8" name="">
             <a:extLst xmlns:a="http://schemas.openxmlformats.org/drawingml/2006/main">
               <a:ext uri="{FF2B5EF4-FFF2-40B4-BE49-F238E27FC236}">
-                <a16:creationId xmlns:a16="http://schemas.microsoft.com/office/drawing/2014/main" id="{09B4622B-DCB9-4528-9B5E-E5B9DDAE281D}"/>
+                <a16:creationId xmlns:a16="http://schemas.microsoft.com/office/drawing/2014/main" id="{F112FC24-2FF3-4BE1-9651-3EC918EE4634}"/>
               </a:ext>
             </a:extLst>
           </p:cNvPr>
@@ -3673,7 +3673,7 @@
           <p:cNvPr id="9" name="">
             <a:extLst xmlns:a="http://schemas.openxmlformats.org/drawingml/2006/main">
               <a:ext uri="{FF2B5EF4-FFF2-40B4-BE49-F238E27FC236}">
-                <a16:creationId xmlns:a16="http://schemas.microsoft.com/office/drawing/2014/main" id="{F99BAE04-219B-4635-B870-EF5E014485DB}"/>
+                <a16:creationId xmlns:a16="http://schemas.microsoft.com/office/drawing/2014/main" id="{44C13681-7AE1-4C51-B02A-AF9DB236C65D}"/>
               </a:ext>
             </a:extLst>
           </p:cNvPr>
@@ -3730,7 +3730,7 @@
           <p:cNvPr id="10" name="">
             <a:extLst xmlns:a="http://schemas.openxmlformats.org/drawingml/2006/main">
               <a:ext uri="{FF2B5EF4-FFF2-40B4-BE49-F238E27FC236}">
-                <a16:creationId xmlns:a16="http://schemas.microsoft.com/office/drawing/2014/main" id="{B6D75F4C-FCBB-4A45-986F-322237A46E23}"/>
+                <a16:creationId xmlns:a16="http://schemas.microsoft.com/office/drawing/2014/main" id="{6407C006-9B58-4B69-8CA6-F0CB6CA61295}"/>
               </a:ext>
             </a:extLst>
           </p:cNvPr>
@@ -3787,7 +3787,7 @@
           <p:cNvPr id="11" name="">
             <a:extLst xmlns:a="http://schemas.openxmlformats.org/drawingml/2006/main">
               <a:ext uri="{FF2B5EF4-FFF2-40B4-BE49-F238E27FC236}">
-                <a16:creationId xmlns:a16="http://schemas.microsoft.com/office/drawing/2014/main" id="{4946098C-2A97-4B4C-849A-F4E1F6C28889}"/>
+                <a16:creationId xmlns:a16="http://schemas.microsoft.com/office/drawing/2014/main" id="{43C6BBAF-BF22-4EE4-A15E-F1C633282E22}"/>
               </a:ext>
             </a:extLst>
           </p:cNvPr>
@@ -3821,7 +3821,7 @@
           <p:cNvPr id="12" name="">
             <a:extLst xmlns:a="http://schemas.openxmlformats.org/drawingml/2006/main">
               <a:ext uri="{FF2B5EF4-FFF2-40B4-BE49-F238E27FC236}">
-                <a16:creationId xmlns:a16="http://schemas.microsoft.com/office/drawing/2014/main" id="{E5B132B7-4CF9-4EB8-B608-01198C568CDA}"/>
+                <a16:creationId xmlns:a16="http://schemas.microsoft.com/office/drawing/2014/main" id="{AC7B2B55-1E42-4960-8C67-20B5815ECBA4}"/>
               </a:ext>
             </a:extLst>
           </p:cNvPr>
@@ -3878,7 +3878,7 @@
           <p:cNvPr id="13" name="">
             <a:extLst xmlns:a="http://schemas.openxmlformats.org/drawingml/2006/main">
               <a:ext uri="{FF2B5EF4-FFF2-40B4-BE49-F238E27FC236}">
-                <a16:creationId xmlns:a16="http://schemas.microsoft.com/office/drawing/2014/main" id="{73377844-D4BD-48D1-812A-B98E63804B44}"/>
+                <a16:creationId xmlns:a16="http://schemas.microsoft.com/office/drawing/2014/main" id="{99A8C866-2BFF-4491-9795-CBC57A6DC8C2}"/>
               </a:ext>
             </a:extLst>
           </p:cNvPr>
@@ -3935,7 +3935,7 @@
           <p:cNvPr id="14" name="">
             <a:extLst xmlns:a="http://schemas.openxmlformats.org/drawingml/2006/main">
               <a:ext uri="{FF2B5EF4-FFF2-40B4-BE49-F238E27FC236}">
-                <a16:creationId xmlns:a16="http://schemas.microsoft.com/office/drawing/2014/main" id="{9B0579E7-C66A-454B-9609-1A1756E8A742}"/>
+                <a16:creationId xmlns:a16="http://schemas.microsoft.com/office/drawing/2014/main" id="{6F129D37-5024-4B28-B392-81CE3C67B184}"/>
               </a:ext>
             </a:extLst>
           </p:cNvPr>
@@ -3992,7 +3992,7 @@
           <p:cNvPr id="15" name="">
             <a:extLst xmlns:a="http://schemas.openxmlformats.org/drawingml/2006/main">
               <a:ext uri="{FF2B5EF4-FFF2-40B4-BE49-F238E27FC236}">
-                <a16:creationId xmlns:a16="http://schemas.microsoft.com/office/drawing/2014/main" id="{4846F979-2CD2-42A6-AA17-6E87E70BAC0D}"/>
+                <a16:creationId xmlns:a16="http://schemas.microsoft.com/office/drawing/2014/main" id="{09666A12-0894-482C-B75F-16EC7F652B29}"/>
               </a:ext>
             </a:extLst>
           </p:cNvPr>
@@ -4026,7 +4026,7 @@
           <p:cNvPr id="16" name="">
             <a:extLst xmlns:a="http://schemas.openxmlformats.org/drawingml/2006/main">
               <a:ext uri="{FF2B5EF4-FFF2-40B4-BE49-F238E27FC236}">
-                <a16:creationId xmlns:a16="http://schemas.microsoft.com/office/drawing/2014/main" id="{4504A794-7833-4AFF-ACE1-81ADABE0510F}"/>
+                <a16:creationId xmlns:a16="http://schemas.microsoft.com/office/drawing/2014/main" id="{94F5FA1F-B00C-4B10-9B1E-95B8300162B3}"/>
               </a:ext>
             </a:extLst>
           </p:cNvPr>
@@ -4083,7 +4083,7 @@
           <p:cNvPr id="17" name="">
             <a:extLst xmlns:a="http://schemas.openxmlformats.org/drawingml/2006/main">
               <a:ext uri="{FF2B5EF4-FFF2-40B4-BE49-F238E27FC236}">
-                <a16:creationId xmlns:a16="http://schemas.microsoft.com/office/drawing/2014/main" id="{DEED5AAF-EF47-46DB-90D3-10DBAD41BC0B}"/>
+                <a16:creationId xmlns:a16="http://schemas.microsoft.com/office/drawing/2014/main" id="{3892809E-43A4-443A-8182-8AAABCB6F6C5}"/>
               </a:ext>
             </a:extLst>
           </p:cNvPr>
@@ -4140,7 +4140,7 @@
           <p:cNvPr id="18" name="">
             <a:extLst xmlns:a="http://schemas.openxmlformats.org/drawingml/2006/main">
               <a:ext uri="{FF2B5EF4-FFF2-40B4-BE49-F238E27FC236}">
-                <a16:creationId xmlns:a16="http://schemas.microsoft.com/office/drawing/2014/main" id="{9AB6781A-20DD-4596-9B49-B44DB2D23B7E}"/>
+                <a16:creationId xmlns:a16="http://schemas.microsoft.com/office/drawing/2014/main" id="{4E394FEC-37B4-4D3C-B374-CFC6743D1D47}"/>
               </a:ext>
             </a:extLst>
           </p:cNvPr>
@@ -4195,7 +4195,7 @@
     </p:spTree>
     <p:extLst>
       <p:ext uri="{BB962C8B-B14F-4D97-AF65-F5344CB8AC3E}">
-        <p14:creationId xmlns:p14="http://schemas.microsoft.com/office/powerpoint/2010/main" val="1210762046"/>
+        <p14:creationId xmlns:p14="http://schemas.microsoft.com/office/powerpoint/2010/main" val="210111087"/>
       </p:ext>
     </p:extLst>
   </p:cSld>
@@ -4350,7 +4350,7 @@
           <p:cNvPr id="23" name="">
             <a:extLst xmlns:a="http://schemas.openxmlformats.org/drawingml/2006/main">
               <a:ext uri="{FF2B5EF4-FFF2-40B4-BE49-F238E27FC236}">
-                <a16:creationId xmlns:a16="http://schemas.microsoft.com/office/drawing/2014/main" id="{C8409259-98A5-4903-AA1E-4B9903348AD6}"/>
+                <a16:creationId xmlns:a16="http://schemas.microsoft.com/office/drawing/2014/main" id="{D20CF4A0-8BA4-4829-B3C7-E98483B65F13}"/>
               </a:ext>
             </a:extLst>
           </p:cNvPr>
@@ -4382,7 +4382,7 @@
           <p:cNvPr id="2" name="">
             <a:extLst xmlns:a="http://schemas.openxmlformats.org/drawingml/2006/main">
               <a:ext uri="{FF2B5EF4-FFF2-40B4-BE49-F238E27FC236}">
-                <a16:creationId xmlns:a16="http://schemas.microsoft.com/office/drawing/2014/main" id="{FFE451F7-1FF1-47BB-B002-6BDE5C7C852A}"/>
+                <a16:creationId xmlns:a16="http://schemas.microsoft.com/office/drawing/2014/main" id="{EB427531-9AC2-4730-ABAF-2CD16D83BC54}"/>
               </a:ext>
             </a:extLst>
           </p:cNvPr>
@@ -4439,7 +4439,7 @@
           <p:cNvPr id="3" name="">
             <a:extLst xmlns:a="http://schemas.openxmlformats.org/drawingml/2006/main">
               <a:ext uri="{FF2B5EF4-FFF2-40B4-BE49-F238E27FC236}">
-                <a16:creationId xmlns:a16="http://schemas.microsoft.com/office/drawing/2014/main" id="{68215B3E-0CCF-40F2-911C-41AC7ECD2AB5}"/>
+                <a16:creationId xmlns:a16="http://schemas.microsoft.com/office/drawing/2014/main" id="{82998870-03AC-4749-9531-F6D99A966256}"/>
               </a:ext>
             </a:extLst>
           </p:cNvPr>
@@ -4471,7 +4471,7 @@
           <p:cNvPr id="4" name="">
             <a:extLst xmlns:a="http://schemas.openxmlformats.org/drawingml/2006/main">
               <a:ext uri="{FF2B5EF4-FFF2-40B4-BE49-F238E27FC236}">
-                <a16:creationId xmlns:a16="http://schemas.microsoft.com/office/drawing/2014/main" id="{0E83C3B2-A6CF-4021-AC5C-13A8F8488EAB}"/>
+                <a16:creationId xmlns:a16="http://schemas.microsoft.com/office/drawing/2014/main" id="{551ED3D1-2BB4-4D9E-A643-B59702E6B565}"/>
               </a:ext>
             </a:extLst>
           </p:cNvPr>
@@ -4528,7 +4528,7 @@
           <p:cNvPr id="5" name="">
             <a:extLst xmlns:a="http://schemas.openxmlformats.org/drawingml/2006/main">
               <a:ext uri="{FF2B5EF4-FFF2-40B4-BE49-F238E27FC236}">
-                <a16:creationId xmlns:a16="http://schemas.microsoft.com/office/drawing/2014/main" id="{EC0457D5-8C50-4D29-8073-1B10F3CBD191}"/>
+                <a16:creationId xmlns:a16="http://schemas.microsoft.com/office/drawing/2014/main" id="{A7B37B5A-0777-4402-875E-AE884A8E243D}"/>
               </a:ext>
             </a:extLst>
           </p:cNvPr>
@@ -4585,7 +4585,7 @@
           <p:cNvPr id="6" name="">
             <a:extLst xmlns:a="http://schemas.openxmlformats.org/drawingml/2006/main">
               <a:ext uri="{FF2B5EF4-FFF2-40B4-BE49-F238E27FC236}">
-                <a16:creationId xmlns:a16="http://schemas.microsoft.com/office/drawing/2014/main" id="{D5538F0B-B55F-45B6-AB26-882A1DDAAF7D}"/>
+                <a16:creationId xmlns:a16="http://schemas.microsoft.com/office/drawing/2014/main" id="{93C484D0-09C4-4A87-895C-755640ED920C}"/>
               </a:ext>
             </a:extLst>
           </p:cNvPr>
@@ -4642,7 +4642,7 @@
           <p:cNvPr id="7" name="">
             <a:extLst xmlns:a="http://schemas.openxmlformats.org/drawingml/2006/main">
               <a:ext uri="{FF2B5EF4-FFF2-40B4-BE49-F238E27FC236}">
-                <a16:creationId xmlns:a16="http://schemas.microsoft.com/office/drawing/2014/main" id="{E830839E-8450-498E-96F2-4F3D5EDCDDB3}"/>
+                <a16:creationId xmlns:a16="http://schemas.microsoft.com/office/drawing/2014/main" id="{E85A95D3-A4B7-428B-A168-292A5AE2ACE6}"/>
               </a:ext>
             </a:extLst>
           </p:cNvPr>
@@ -4674,7 +4674,7 @@
           <p:cNvPr id="8" name="">
             <a:extLst xmlns:a="http://schemas.openxmlformats.org/drawingml/2006/main">
               <a:ext uri="{FF2B5EF4-FFF2-40B4-BE49-F238E27FC236}">
-                <a16:creationId xmlns:a16="http://schemas.microsoft.com/office/drawing/2014/main" id="{E2E342A2-FA5F-4ABA-8EF4-F338B817C451}"/>
+                <a16:creationId xmlns:a16="http://schemas.microsoft.com/office/drawing/2014/main" id="{7AA8C86F-CE60-4CCF-BA1B-9A3670C2B7EA}"/>
               </a:ext>
             </a:extLst>
           </p:cNvPr>
@@ -4731,7 +4731,7 @@
           <p:cNvPr id="9" name="">
             <a:extLst xmlns:a="http://schemas.openxmlformats.org/drawingml/2006/main">
               <a:ext uri="{FF2B5EF4-FFF2-40B4-BE49-F238E27FC236}">
-                <a16:creationId xmlns:a16="http://schemas.microsoft.com/office/drawing/2014/main" id="{CF02D0E5-613A-4C8B-ADA1-506834A5B040}"/>
+                <a16:creationId xmlns:a16="http://schemas.microsoft.com/office/drawing/2014/main" id="{AD1514F6-1C5B-4DD9-B5D6-F92F4B16A563}"/>
               </a:ext>
             </a:extLst>
           </p:cNvPr>
@@ -4788,7 +4788,7 @@
           <p:cNvPr id="10" name="">
             <a:extLst xmlns:a="http://schemas.openxmlformats.org/drawingml/2006/main">
               <a:ext uri="{FF2B5EF4-FFF2-40B4-BE49-F238E27FC236}">
-                <a16:creationId xmlns:a16="http://schemas.microsoft.com/office/drawing/2014/main" id="{E81A5A54-25F1-406A-9F7A-17344B2B16BA}"/>
+                <a16:creationId xmlns:a16="http://schemas.microsoft.com/office/drawing/2014/main" id="{5D776119-39AD-435F-81A5-483012D6EA59}"/>
               </a:ext>
             </a:extLst>
           </p:cNvPr>
@@ -4822,7 +4822,7 @@
           <p:cNvPr id="11" name="">
             <a:extLst xmlns:a="http://schemas.openxmlformats.org/drawingml/2006/main">
               <a:ext uri="{FF2B5EF4-FFF2-40B4-BE49-F238E27FC236}">
-                <a16:creationId xmlns:a16="http://schemas.microsoft.com/office/drawing/2014/main" id="{E483DA32-ACB2-41F4-8696-9A5B2E9EC8D6}"/>
+                <a16:creationId xmlns:a16="http://schemas.microsoft.com/office/drawing/2014/main" id="{02501FA1-1634-43FB-AE34-D29B02C670BF}"/>
               </a:ext>
             </a:extLst>
           </p:cNvPr>
@@ -4854,7 +4854,7 @@
           <p:cNvPr id="12" name="">
             <a:extLst xmlns:a="http://schemas.openxmlformats.org/drawingml/2006/main">
               <a:ext uri="{FF2B5EF4-FFF2-40B4-BE49-F238E27FC236}">
-                <a16:creationId xmlns:a16="http://schemas.microsoft.com/office/drawing/2014/main" id="{98DA3D0C-3472-4AA3-9487-E890EDBC8C52}"/>
+                <a16:creationId xmlns:a16="http://schemas.microsoft.com/office/drawing/2014/main" id="{F48F1C49-B1E0-466F-84ED-DA8F8730F90B}"/>
               </a:ext>
             </a:extLst>
           </p:cNvPr>
@@ -4911,7 +4911,7 @@
           <p:cNvPr id="13" name="">
             <a:extLst xmlns:a="http://schemas.openxmlformats.org/drawingml/2006/main">
               <a:ext uri="{FF2B5EF4-FFF2-40B4-BE49-F238E27FC236}">
-                <a16:creationId xmlns:a16="http://schemas.microsoft.com/office/drawing/2014/main" id="{2FAF4FCB-FBFF-4429-86E5-181AFCEB5D90}"/>
+                <a16:creationId xmlns:a16="http://schemas.microsoft.com/office/drawing/2014/main" id="{ED684556-F500-4B91-B0E4-720A34B2C608}"/>
               </a:ext>
             </a:extLst>
           </p:cNvPr>
@@ -4968,7 +4968,7 @@
           <p:cNvPr id="14" name="">
             <a:extLst xmlns:a="http://schemas.openxmlformats.org/drawingml/2006/main">
               <a:ext uri="{FF2B5EF4-FFF2-40B4-BE49-F238E27FC236}">
-                <a16:creationId xmlns:a16="http://schemas.microsoft.com/office/drawing/2014/main" id="{AFCA1F81-A410-4C9B-A59F-2277E1A3F4A6}"/>
+                <a16:creationId xmlns:a16="http://schemas.microsoft.com/office/drawing/2014/main" id="{CE04437B-CAB6-4F1C-A18A-812A9218C11C}"/>
               </a:ext>
             </a:extLst>
           </p:cNvPr>
@@ -5002,7 +5002,7 @@
           <p:cNvPr id="15" name="">
             <a:extLst xmlns:a="http://schemas.openxmlformats.org/drawingml/2006/main">
               <a:ext uri="{FF2B5EF4-FFF2-40B4-BE49-F238E27FC236}">
-                <a16:creationId xmlns:a16="http://schemas.microsoft.com/office/drawing/2014/main" id="{5ADBE2E2-DC0A-450F-9350-7B89B6C4DD03}"/>
+                <a16:creationId xmlns:a16="http://schemas.microsoft.com/office/drawing/2014/main" id="{0FBF6BC9-AB7F-429B-A2A0-DA39DD62FF8A}"/>
               </a:ext>
             </a:extLst>
           </p:cNvPr>
@@ -5034,7 +5034,7 @@
           <p:cNvPr id="16" name="">
             <a:extLst xmlns:a="http://schemas.openxmlformats.org/drawingml/2006/main">
               <a:ext uri="{FF2B5EF4-FFF2-40B4-BE49-F238E27FC236}">
-                <a16:creationId xmlns:a16="http://schemas.microsoft.com/office/drawing/2014/main" id="{86BDC225-70ED-4209-A2E7-174E8866E995}"/>
+                <a16:creationId xmlns:a16="http://schemas.microsoft.com/office/drawing/2014/main" id="{36546A22-F815-4F1B-A126-39432F1E2B2D}"/>
               </a:ext>
             </a:extLst>
           </p:cNvPr>
@@ -5091,7 +5091,7 @@
           <p:cNvPr id="17" name="">
             <a:extLst xmlns:a="http://schemas.openxmlformats.org/drawingml/2006/main">
               <a:ext uri="{FF2B5EF4-FFF2-40B4-BE49-F238E27FC236}">
-                <a16:creationId xmlns:a16="http://schemas.microsoft.com/office/drawing/2014/main" id="{F12B6DA2-6398-4F09-98C9-0A90C20FAAA6}"/>
+                <a16:creationId xmlns:a16="http://schemas.microsoft.com/office/drawing/2014/main" id="{5B6F1773-F810-4DAB-AB67-8DDF5650D46F}"/>
               </a:ext>
             </a:extLst>
           </p:cNvPr>
@@ -5148,7 +5148,7 @@
           <p:cNvPr id="18" name="">
             <a:extLst xmlns:a="http://schemas.openxmlformats.org/drawingml/2006/main">
               <a:ext uri="{FF2B5EF4-FFF2-40B4-BE49-F238E27FC236}">
-                <a16:creationId xmlns:a16="http://schemas.microsoft.com/office/drawing/2014/main" id="{854B11EA-40B3-49A6-B888-0E31E8064037}"/>
+                <a16:creationId xmlns:a16="http://schemas.microsoft.com/office/drawing/2014/main" id="{3D55614A-BA3E-41CF-A497-76E14EAE8CC3}"/>
               </a:ext>
             </a:extLst>
           </p:cNvPr>
@@ -5182,7 +5182,7 @@
           <p:cNvPr id="19" name="">
             <a:extLst xmlns:a="http://schemas.openxmlformats.org/drawingml/2006/main">
               <a:ext uri="{FF2B5EF4-FFF2-40B4-BE49-F238E27FC236}">
-                <a16:creationId xmlns:a16="http://schemas.microsoft.com/office/drawing/2014/main" id="{7A3C1D67-1F25-4902-9BDA-1A7C32E7CE9C}"/>
+                <a16:creationId xmlns:a16="http://schemas.microsoft.com/office/drawing/2014/main" id="{B04C7999-7C1A-40CD-BA0A-CBD4B19F4FEB}"/>
               </a:ext>
             </a:extLst>
           </p:cNvPr>
@@ -5214,7 +5214,7 @@
           <p:cNvPr id="20" name="">
             <a:extLst xmlns:a="http://schemas.openxmlformats.org/drawingml/2006/main">
               <a:ext uri="{FF2B5EF4-FFF2-40B4-BE49-F238E27FC236}">
-                <a16:creationId xmlns:a16="http://schemas.microsoft.com/office/drawing/2014/main" id="{87902153-BB79-4000-AAAE-DFCC621F51E9}"/>
+                <a16:creationId xmlns:a16="http://schemas.microsoft.com/office/drawing/2014/main" id="{3EE3A776-543C-49B4-A9C8-9C1F7E98194F}"/>
               </a:ext>
             </a:extLst>
           </p:cNvPr>
@@ -5271,7 +5271,7 @@
           <p:cNvPr id="21" name="">
             <a:extLst xmlns:a="http://schemas.openxmlformats.org/drawingml/2006/main">
               <a:ext uri="{FF2B5EF4-FFF2-40B4-BE49-F238E27FC236}">
-                <a16:creationId xmlns:a16="http://schemas.microsoft.com/office/drawing/2014/main" id="{DF051423-9951-47CA-9A7A-24FA3DC6DF96}"/>
+                <a16:creationId xmlns:a16="http://schemas.microsoft.com/office/drawing/2014/main" id="{72E74F4F-6FE5-4AE3-946E-4EDF5E791E43}"/>
               </a:ext>
             </a:extLst>
           </p:cNvPr>
@@ -5328,7 +5328,7 @@
           <p:cNvPr id="22" name="">
             <a:extLst xmlns:a="http://schemas.openxmlformats.org/drawingml/2006/main">
               <a:ext uri="{FF2B5EF4-FFF2-40B4-BE49-F238E27FC236}">
-                <a16:creationId xmlns:a16="http://schemas.microsoft.com/office/drawing/2014/main" id="{2608B9B5-D335-4AB2-B579-0A7EE90206E9}"/>
+                <a16:creationId xmlns:a16="http://schemas.microsoft.com/office/drawing/2014/main" id="{84136858-986D-42D2-B8AD-D9A236EF5302}"/>
               </a:ext>
             </a:extLst>
           </p:cNvPr>
@@ -5383,7 +5383,7 @@
     </p:spTree>
     <p:extLst>
       <p:ext uri="{BB962C8B-B14F-4D97-AF65-F5344CB8AC3E}">
-        <p14:creationId xmlns:p14="http://schemas.microsoft.com/office/powerpoint/2010/main" val="1148763589"/>
+        <p14:creationId xmlns:p14="http://schemas.microsoft.com/office/powerpoint/2010/main" val="1130817382"/>
       </p:ext>
     </p:extLst>
   </p:cSld>
@@ -5584,7 +5584,7 @@
           <p:cNvPr id="23" name="">
             <a:extLst xmlns:a="http://schemas.openxmlformats.org/drawingml/2006/main">
               <a:ext uri="{FF2B5EF4-FFF2-40B4-BE49-F238E27FC236}">
-                <a16:creationId xmlns:a16="http://schemas.microsoft.com/office/drawing/2014/main" id="{05D46319-A89B-41B5-BD9C-FB2C8A0D577B}"/>
+                <a16:creationId xmlns:a16="http://schemas.microsoft.com/office/drawing/2014/main" id="{0158B4BC-77DA-4828-BAF4-A64F9831B982}"/>
               </a:ext>
             </a:extLst>
           </p:cNvPr>
@@ -5616,7 +5616,7 @@
           <p:cNvPr id="2" name="">
             <a:extLst xmlns:a="http://schemas.openxmlformats.org/drawingml/2006/main">
               <a:ext uri="{FF2B5EF4-FFF2-40B4-BE49-F238E27FC236}">
-                <a16:creationId xmlns:a16="http://schemas.microsoft.com/office/drawing/2014/main" id="{809487BF-5168-449B-9CB2-DBA5ABEA0B43}"/>
+                <a16:creationId xmlns:a16="http://schemas.microsoft.com/office/drawing/2014/main" id="{82FD7846-0DC5-400F-A413-74B391721C3B}"/>
               </a:ext>
             </a:extLst>
           </p:cNvPr>
@@ -5673,7 +5673,7 @@
           <p:cNvPr id="3" name="">
             <a:extLst xmlns:a="http://schemas.openxmlformats.org/drawingml/2006/main">
               <a:ext uri="{FF2B5EF4-FFF2-40B4-BE49-F238E27FC236}">
-                <a16:creationId xmlns:a16="http://schemas.microsoft.com/office/drawing/2014/main" id="{F07F9251-4A2B-46E8-A7FC-A209019B862B}"/>
+                <a16:creationId xmlns:a16="http://schemas.microsoft.com/office/drawing/2014/main" id="{1888180C-5ADF-4EE4-8971-50F8E1EE2E1D}"/>
               </a:ext>
             </a:extLst>
           </p:cNvPr>
@@ -5705,7 +5705,7 @@
           <p:cNvPr id="4" name="">
             <a:extLst xmlns:a="http://schemas.openxmlformats.org/drawingml/2006/main">
               <a:ext uri="{FF2B5EF4-FFF2-40B4-BE49-F238E27FC236}">
-                <a16:creationId xmlns:a16="http://schemas.microsoft.com/office/drawing/2014/main" id="{EC8D5D66-707A-4364-BF25-D7A9781CA067}"/>
+                <a16:creationId xmlns:a16="http://schemas.microsoft.com/office/drawing/2014/main" id="{9F2DFDCD-3149-4C12-B297-8CC34FF01017}"/>
               </a:ext>
             </a:extLst>
           </p:cNvPr>
@@ -5762,7 +5762,7 @@
           <p:cNvPr id="5" name="">
             <a:extLst xmlns:a="http://schemas.openxmlformats.org/drawingml/2006/main">
               <a:ext uri="{FF2B5EF4-FFF2-40B4-BE49-F238E27FC236}">
-                <a16:creationId xmlns:a16="http://schemas.microsoft.com/office/drawing/2014/main" id="{D31F90C4-A427-4F43-92FF-8CAA723AFB36}"/>
+                <a16:creationId xmlns:a16="http://schemas.microsoft.com/office/drawing/2014/main" id="{2A7D83EC-4BDC-4106-8CCE-8B4934D1E2DE}"/>
               </a:ext>
             </a:extLst>
           </p:cNvPr>
@@ -5819,7 +5819,7 @@
           <p:cNvPr id="6" name="">
             <a:extLst xmlns:a="http://schemas.openxmlformats.org/drawingml/2006/main">
               <a:ext uri="{FF2B5EF4-FFF2-40B4-BE49-F238E27FC236}">
-                <a16:creationId xmlns:a16="http://schemas.microsoft.com/office/drawing/2014/main" id="{40183AE8-CA64-4D45-9900-7FCAE3561272}"/>
+                <a16:creationId xmlns:a16="http://schemas.microsoft.com/office/drawing/2014/main" id="{A1F64EAD-A232-475F-BE19-B93030C130B7}"/>
               </a:ext>
             </a:extLst>
           </p:cNvPr>
@@ -5876,7 +5876,7 @@
           <p:cNvPr id="7" name="">
             <a:extLst xmlns:a="http://schemas.openxmlformats.org/drawingml/2006/main">
               <a:ext uri="{FF2B5EF4-FFF2-40B4-BE49-F238E27FC236}">
-                <a16:creationId xmlns:a16="http://schemas.microsoft.com/office/drawing/2014/main" id="{0638F309-25ED-49F0-BEB2-88B5C901B3B1}"/>
+                <a16:creationId xmlns:a16="http://schemas.microsoft.com/office/drawing/2014/main" id="{37CFB041-6ADB-4004-AF2E-1B2B7F771786}"/>
               </a:ext>
             </a:extLst>
           </p:cNvPr>
@@ -5908,7 +5908,7 @@
           <p:cNvPr id="8" name="">
             <a:extLst xmlns:a="http://schemas.openxmlformats.org/drawingml/2006/main">
               <a:ext uri="{FF2B5EF4-FFF2-40B4-BE49-F238E27FC236}">
-                <a16:creationId xmlns:a16="http://schemas.microsoft.com/office/drawing/2014/main" id="{D9A7BA65-5FA3-42C7-9D7F-6497896A8640}"/>
+                <a16:creationId xmlns:a16="http://schemas.microsoft.com/office/drawing/2014/main" id="{B7201A9A-4474-4EDC-8067-32C575882A89}"/>
               </a:ext>
             </a:extLst>
           </p:cNvPr>
@@ -5965,7 +5965,7 @@
           <p:cNvPr id="9" name="">
             <a:extLst xmlns:a="http://schemas.openxmlformats.org/drawingml/2006/main">
               <a:ext uri="{FF2B5EF4-FFF2-40B4-BE49-F238E27FC236}">
-                <a16:creationId xmlns:a16="http://schemas.microsoft.com/office/drawing/2014/main" id="{14839CC3-B88B-4366-B637-67518584D103}"/>
+                <a16:creationId xmlns:a16="http://schemas.microsoft.com/office/drawing/2014/main" id="{A054EFC6-5A8A-482F-A571-BBF4D5DCEA30}"/>
               </a:ext>
             </a:extLst>
           </p:cNvPr>
@@ -6022,7 +6022,7 @@
           <p:cNvPr id="10" name="">
             <a:extLst xmlns:a="http://schemas.openxmlformats.org/drawingml/2006/main">
               <a:ext uri="{FF2B5EF4-FFF2-40B4-BE49-F238E27FC236}">
-                <a16:creationId xmlns:a16="http://schemas.microsoft.com/office/drawing/2014/main" id="{F5554898-0FCE-4DC6-BE2E-6DF6CDB1F7C0}"/>
+                <a16:creationId xmlns:a16="http://schemas.microsoft.com/office/drawing/2014/main" id="{4EA0DBCB-B11C-4E04-93BF-82531164CD99}"/>
               </a:ext>
             </a:extLst>
           </p:cNvPr>
@@ -6056,7 +6056,7 @@
           <p:cNvPr id="11" name="">
             <a:extLst xmlns:a="http://schemas.openxmlformats.org/drawingml/2006/main">
               <a:ext uri="{FF2B5EF4-FFF2-40B4-BE49-F238E27FC236}">
-                <a16:creationId xmlns:a16="http://schemas.microsoft.com/office/drawing/2014/main" id="{AA0F62D2-4049-4231-B5B4-E2FD8A1468A4}"/>
+                <a16:creationId xmlns:a16="http://schemas.microsoft.com/office/drawing/2014/main" id="{0081E162-91AB-4F07-BB94-D984037647CF}"/>
               </a:ext>
             </a:extLst>
           </p:cNvPr>
@@ -6088,7 +6088,7 @@
           <p:cNvPr id="12" name="">
             <a:extLst xmlns:a="http://schemas.openxmlformats.org/drawingml/2006/main">
               <a:ext uri="{FF2B5EF4-FFF2-40B4-BE49-F238E27FC236}">
-                <a16:creationId xmlns:a16="http://schemas.microsoft.com/office/drawing/2014/main" id="{8D9893FB-EAD7-4356-B3F0-51C0A9D943ED}"/>
+                <a16:creationId xmlns:a16="http://schemas.microsoft.com/office/drawing/2014/main" id="{35013041-4B4E-4413-87C0-6D17F92F3C05}"/>
               </a:ext>
             </a:extLst>
           </p:cNvPr>
@@ -6145,7 +6145,7 @@
           <p:cNvPr id="13" name="">
             <a:extLst xmlns:a="http://schemas.openxmlformats.org/drawingml/2006/main">
               <a:ext uri="{FF2B5EF4-FFF2-40B4-BE49-F238E27FC236}">
-                <a16:creationId xmlns:a16="http://schemas.microsoft.com/office/drawing/2014/main" id="{A385BE84-180A-478E-8CDA-6F2B7DAC8211}"/>
+                <a16:creationId xmlns:a16="http://schemas.microsoft.com/office/drawing/2014/main" id="{3FFD0D81-B7AF-4492-B883-FCFBD1D1F136}"/>
               </a:ext>
             </a:extLst>
           </p:cNvPr>
@@ -6202,7 +6202,7 @@
           <p:cNvPr id="14" name="">
             <a:extLst xmlns:a="http://schemas.openxmlformats.org/drawingml/2006/main">
               <a:ext uri="{FF2B5EF4-FFF2-40B4-BE49-F238E27FC236}">
-                <a16:creationId xmlns:a16="http://schemas.microsoft.com/office/drawing/2014/main" id="{BEDAD0CE-429E-45F0-B36E-F042618A9B1E}"/>
+                <a16:creationId xmlns:a16="http://schemas.microsoft.com/office/drawing/2014/main" id="{BE06E346-36ED-42A6-AB6B-E10BFD8FE95F}"/>
               </a:ext>
             </a:extLst>
           </p:cNvPr>
@@ -6236,7 +6236,7 @@
           <p:cNvPr id="15" name="">
             <a:extLst xmlns:a="http://schemas.openxmlformats.org/drawingml/2006/main">
               <a:ext uri="{FF2B5EF4-FFF2-40B4-BE49-F238E27FC236}">
-                <a16:creationId xmlns:a16="http://schemas.microsoft.com/office/drawing/2014/main" id="{A17A24FD-E68C-4F71-9A53-B071A43D0025}"/>
+                <a16:creationId xmlns:a16="http://schemas.microsoft.com/office/drawing/2014/main" id="{248343A9-6F3D-4748-8312-55C151332289}"/>
               </a:ext>
             </a:extLst>
           </p:cNvPr>
@@ -6268,7 +6268,7 @@
           <p:cNvPr id="16" name="">
             <a:extLst xmlns:a="http://schemas.openxmlformats.org/drawingml/2006/main">
               <a:ext uri="{FF2B5EF4-FFF2-40B4-BE49-F238E27FC236}">
-                <a16:creationId xmlns:a16="http://schemas.microsoft.com/office/drawing/2014/main" id="{4B0B2547-358F-473B-9E4B-04B82DD503CD}"/>
+                <a16:creationId xmlns:a16="http://schemas.microsoft.com/office/drawing/2014/main" id="{48479241-29C1-4655-BA7D-5EF23E331EBE}"/>
               </a:ext>
             </a:extLst>
           </p:cNvPr>
@@ -6325,7 +6325,7 @@
           <p:cNvPr id="17" name="">
             <a:extLst xmlns:a="http://schemas.openxmlformats.org/drawingml/2006/main">
               <a:ext uri="{FF2B5EF4-FFF2-40B4-BE49-F238E27FC236}">
-                <a16:creationId xmlns:a16="http://schemas.microsoft.com/office/drawing/2014/main" id="{A4B39030-A0F8-4953-A8CF-34A76AAC928C}"/>
+                <a16:creationId xmlns:a16="http://schemas.microsoft.com/office/drawing/2014/main" id="{6993D30B-A23D-41B2-BE7E-9ED5517FE5B6}"/>
               </a:ext>
             </a:extLst>
           </p:cNvPr>
@@ -6382,7 +6382,7 @@
           <p:cNvPr id="18" name="">
             <a:extLst xmlns:a="http://schemas.openxmlformats.org/drawingml/2006/main">
               <a:ext uri="{FF2B5EF4-FFF2-40B4-BE49-F238E27FC236}">
-                <a16:creationId xmlns:a16="http://schemas.microsoft.com/office/drawing/2014/main" id="{FC18D389-8A30-4AEF-8CAE-C17DABDFFEB6}"/>
+                <a16:creationId xmlns:a16="http://schemas.microsoft.com/office/drawing/2014/main" id="{1A31F680-AC31-4AC0-BC15-B211908B57E2}"/>
               </a:ext>
             </a:extLst>
           </p:cNvPr>
@@ -6416,7 +6416,7 @@
           <p:cNvPr id="19" name="">
             <a:extLst xmlns:a="http://schemas.openxmlformats.org/drawingml/2006/main">
               <a:ext uri="{FF2B5EF4-FFF2-40B4-BE49-F238E27FC236}">
-                <a16:creationId xmlns:a16="http://schemas.microsoft.com/office/drawing/2014/main" id="{BC6F23A8-212F-4EC0-8351-1ACE03607F49}"/>
+                <a16:creationId xmlns:a16="http://schemas.microsoft.com/office/drawing/2014/main" id="{A369613C-0B5D-4395-8C4E-100235010E10}"/>
               </a:ext>
             </a:extLst>
           </p:cNvPr>
@@ -6448,7 +6448,7 @@
           <p:cNvPr id="20" name="">
             <a:extLst xmlns:a="http://schemas.openxmlformats.org/drawingml/2006/main">
               <a:ext uri="{FF2B5EF4-FFF2-40B4-BE49-F238E27FC236}">
-                <a16:creationId xmlns:a16="http://schemas.microsoft.com/office/drawing/2014/main" id="{897620FA-C323-4B7B-9DBC-8529F2BADB99}"/>
+                <a16:creationId xmlns:a16="http://schemas.microsoft.com/office/drawing/2014/main" id="{15BEA07F-E5F4-4D0D-9852-76E836ACEFB7}"/>
               </a:ext>
             </a:extLst>
           </p:cNvPr>
@@ -6505,7 +6505,7 @@
           <p:cNvPr id="21" name="">
             <a:extLst xmlns:a="http://schemas.openxmlformats.org/drawingml/2006/main">
               <a:ext uri="{FF2B5EF4-FFF2-40B4-BE49-F238E27FC236}">
-                <a16:creationId xmlns:a16="http://schemas.microsoft.com/office/drawing/2014/main" id="{3DA8998D-9DFC-466B-9F80-24E4BBCE06C2}"/>
+                <a16:creationId xmlns:a16="http://schemas.microsoft.com/office/drawing/2014/main" id="{F51341E2-9204-4708-A9FA-323946BEC72B}"/>
               </a:ext>
             </a:extLst>
           </p:cNvPr>
@@ -6562,7 +6562,7 @@
           <p:cNvPr id="22" name="">
             <a:extLst xmlns:a="http://schemas.openxmlformats.org/drawingml/2006/main">
               <a:ext uri="{FF2B5EF4-FFF2-40B4-BE49-F238E27FC236}">
-                <a16:creationId xmlns:a16="http://schemas.microsoft.com/office/drawing/2014/main" id="{923F2DDF-A67D-4D22-8018-1A4664BB3BFC}"/>
+                <a16:creationId xmlns:a16="http://schemas.microsoft.com/office/drawing/2014/main" id="{FB73DA4A-F78B-4B6B-8AEC-CD6C240CA2B6}"/>
               </a:ext>
             </a:extLst>
           </p:cNvPr>
@@ -6617,7 +6617,7 @@
     </p:spTree>
     <p:extLst>
       <p:ext uri="{BB962C8B-B14F-4D97-AF65-F5344CB8AC3E}">
-        <p14:creationId xmlns:p14="http://schemas.microsoft.com/office/powerpoint/2010/main" val="1423747902"/>
+        <p14:creationId xmlns:p14="http://schemas.microsoft.com/office/powerpoint/2010/main" val="1706298129"/>
       </p:ext>
     </p:extLst>
   </p:cSld>
@@ -6818,7 +6818,7 @@
           <p:cNvPr id="16" name="">
             <a:extLst xmlns:a="http://schemas.openxmlformats.org/drawingml/2006/main">
               <a:ext uri="{FF2B5EF4-FFF2-40B4-BE49-F238E27FC236}">
-                <a16:creationId xmlns:a16="http://schemas.microsoft.com/office/drawing/2014/main" id="{D3EC0AE6-4247-4279-A59C-300C4494F83E}"/>
+                <a16:creationId xmlns:a16="http://schemas.microsoft.com/office/drawing/2014/main" id="{E1D81B18-630E-412C-914A-97071A644AF0}"/>
               </a:ext>
             </a:extLst>
           </p:cNvPr>
@@ -6850,7 +6850,7 @@
           <p:cNvPr id="2" name="">
             <a:extLst xmlns:a="http://schemas.openxmlformats.org/drawingml/2006/main">
               <a:ext uri="{FF2B5EF4-FFF2-40B4-BE49-F238E27FC236}">
-                <a16:creationId xmlns:a16="http://schemas.microsoft.com/office/drawing/2014/main" id="{9C2CF7F1-8990-4F88-88F0-DFDC5671F5DE}"/>
+                <a16:creationId xmlns:a16="http://schemas.microsoft.com/office/drawing/2014/main" id="{CCD21E16-D6A5-414D-B222-397DE8F8DE34}"/>
               </a:ext>
             </a:extLst>
           </p:cNvPr>
@@ -6907,7 +6907,7 @@
           <p:cNvPr id="3" name="">
             <a:extLst xmlns:a="http://schemas.openxmlformats.org/drawingml/2006/main">
               <a:ext uri="{FF2B5EF4-FFF2-40B4-BE49-F238E27FC236}">
-                <a16:creationId xmlns:a16="http://schemas.microsoft.com/office/drawing/2014/main" id="{C0FDE127-D52E-42F5-AB27-AED667779468}"/>
+                <a16:creationId xmlns:a16="http://schemas.microsoft.com/office/drawing/2014/main" id="{905B5777-F148-4F7F-AA61-CD5D437DC21F}"/>
               </a:ext>
             </a:extLst>
           </p:cNvPr>
@@ -6939,7 +6939,7 @@
           <p:cNvPr id="4" name="">
             <a:extLst xmlns:a="http://schemas.openxmlformats.org/drawingml/2006/main">
               <a:ext uri="{FF2B5EF4-FFF2-40B4-BE49-F238E27FC236}">
-                <a16:creationId xmlns:a16="http://schemas.microsoft.com/office/drawing/2014/main" id="{81077019-69EF-47A1-8725-B24CA0777B15}"/>
+                <a16:creationId xmlns:a16="http://schemas.microsoft.com/office/drawing/2014/main" id="{F62B4778-905A-4296-8A68-3829B89774BF}"/>
               </a:ext>
             </a:extLst>
           </p:cNvPr>
@@ -6996,7 +6996,7 @@
           <p:cNvPr id="5" name="">
             <a:extLst xmlns:a="http://schemas.openxmlformats.org/drawingml/2006/main">
               <a:ext uri="{FF2B5EF4-FFF2-40B4-BE49-F238E27FC236}">
-                <a16:creationId xmlns:a16="http://schemas.microsoft.com/office/drawing/2014/main" id="{6669B0E3-B3DB-424D-B505-89CBE30BE858}"/>
+                <a16:creationId xmlns:a16="http://schemas.microsoft.com/office/drawing/2014/main" id="{1915C45F-2C82-4245-A992-5D1AAFC94275}"/>
               </a:ext>
             </a:extLst>
           </p:cNvPr>
@@ -7053,7 +7053,7 @@
           <p:cNvPr id="6" name="">
             <a:extLst xmlns:a="http://schemas.openxmlformats.org/drawingml/2006/main">
               <a:ext uri="{FF2B5EF4-FFF2-40B4-BE49-F238E27FC236}">
-                <a16:creationId xmlns:a16="http://schemas.microsoft.com/office/drawing/2014/main" id="{025E3E5C-19B8-427F-A6C6-09C25EBBF504}"/>
+                <a16:creationId xmlns:a16="http://schemas.microsoft.com/office/drawing/2014/main" id="{8EBA1445-D57E-4F11-9335-8730C5EA05A7}"/>
               </a:ext>
             </a:extLst>
           </p:cNvPr>
@@ -7110,7 +7110,7 @@
           <p:cNvPr id="7" name="">
             <a:extLst xmlns:a="http://schemas.openxmlformats.org/drawingml/2006/main">
               <a:ext uri="{FF2B5EF4-FFF2-40B4-BE49-F238E27FC236}">
-                <a16:creationId xmlns:a16="http://schemas.microsoft.com/office/drawing/2014/main" id="{E92803F6-1116-4230-9F81-0F802FD5F4CC}"/>
+                <a16:creationId xmlns:a16="http://schemas.microsoft.com/office/drawing/2014/main" id="{9026ECC2-C0F6-4429-A078-0B2CCBD019A0}"/>
               </a:ext>
             </a:extLst>
           </p:cNvPr>
@@ -7142,7 +7142,7 @@
           <p:cNvPr id="8" name="">
             <a:extLst xmlns:a="http://schemas.openxmlformats.org/drawingml/2006/main">
               <a:ext uri="{FF2B5EF4-FFF2-40B4-BE49-F238E27FC236}">
-                <a16:creationId xmlns:a16="http://schemas.microsoft.com/office/drawing/2014/main" id="{E5FFF22E-B337-49F0-8845-4047111D3B26}"/>
+                <a16:creationId xmlns:a16="http://schemas.microsoft.com/office/drawing/2014/main" id="{DBAE0670-21D9-4BCC-85B3-8B74AE8940DA}"/>
               </a:ext>
             </a:extLst>
           </p:cNvPr>
@@ -7199,7 +7199,7 @@
           <p:cNvPr id="9" name="">
             <a:extLst xmlns:a="http://schemas.openxmlformats.org/drawingml/2006/main">
               <a:ext uri="{FF2B5EF4-FFF2-40B4-BE49-F238E27FC236}">
-                <a16:creationId xmlns:a16="http://schemas.microsoft.com/office/drawing/2014/main" id="{30D88022-B4FF-4C25-A5DA-570E4CF03DD9}"/>
+                <a16:creationId xmlns:a16="http://schemas.microsoft.com/office/drawing/2014/main" id="{83A39452-3E64-4D55-AB16-A28945D363A1}"/>
               </a:ext>
             </a:extLst>
           </p:cNvPr>
@@ -7256,7 +7256,7 @@
           <p:cNvPr id="10" name="">
             <a:extLst xmlns:a="http://schemas.openxmlformats.org/drawingml/2006/main">
               <a:ext uri="{FF2B5EF4-FFF2-40B4-BE49-F238E27FC236}">
-                <a16:creationId xmlns:a16="http://schemas.microsoft.com/office/drawing/2014/main" id="{527253E6-EC41-4418-B99E-B4217F9A1E56}"/>
+                <a16:creationId xmlns:a16="http://schemas.microsoft.com/office/drawing/2014/main" id="{39AA2BD5-1A78-4D51-973D-E7F6EE0F49E4}"/>
               </a:ext>
             </a:extLst>
           </p:cNvPr>
@@ -7313,7 +7313,7 @@
           <p:cNvPr id="11" name="">
             <a:extLst xmlns:a="http://schemas.openxmlformats.org/drawingml/2006/main">
               <a:ext uri="{FF2B5EF4-FFF2-40B4-BE49-F238E27FC236}">
-                <a16:creationId xmlns:a16="http://schemas.microsoft.com/office/drawing/2014/main" id="{6C5A39E9-542C-4BE9-8558-9DABC3A79EC6}"/>
+                <a16:creationId xmlns:a16="http://schemas.microsoft.com/office/drawing/2014/main" id="{8EAC8239-5DDB-4D52-A9A3-A7CD09D998E3}"/>
               </a:ext>
             </a:extLst>
           </p:cNvPr>
@@ -7345,7 +7345,7 @@
           <p:cNvPr id="12" name="">
             <a:extLst xmlns:a="http://schemas.openxmlformats.org/drawingml/2006/main">
               <a:ext uri="{FF2B5EF4-FFF2-40B4-BE49-F238E27FC236}">
-                <a16:creationId xmlns:a16="http://schemas.microsoft.com/office/drawing/2014/main" id="{D71E0610-3ACA-4F97-9C0D-85030DF34EE6}"/>
+                <a16:creationId xmlns:a16="http://schemas.microsoft.com/office/drawing/2014/main" id="{7D3B8969-C5D5-4051-B60C-DFC47BF7D5EA}"/>
               </a:ext>
             </a:extLst>
           </p:cNvPr>
@@ -7402,7 +7402,7 @@
           <p:cNvPr id="13" name="">
             <a:extLst xmlns:a="http://schemas.openxmlformats.org/drawingml/2006/main">
               <a:ext uri="{FF2B5EF4-FFF2-40B4-BE49-F238E27FC236}">
-                <a16:creationId xmlns:a16="http://schemas.microsoft.com/office/drawing/2014/main" id="{CDD04591-64C8-4EA7-BA22-9061E92DE86E}"/>
+                <a16:creationId xmlns:a16="http://schemas.microsoft.com/office/drawing/2014/main" id="{F00496B7-6E8E-4CA6-859B-70AFC1DBF422}"/>
               </a:ext>
             </a:extLst>
           </p:cNvPr>
@@ -7459,7 +7459,7 @@
           <p:cNvPr id="14" name="">
             <a:extLst xmlns:a="http://schemas.openxmlformats.org/drawingml/2006/main">
               <a:ext uri="{FF2B5EF4-FFF2-40B4-BE49-F238E27FC236}">
-                <a16:creationId xmlns:a16="http://schemas.microsoft.com/office/drawing/2014/main" id="{5EEE7537-E0AB-47E8-B8F5-A9604B5799D1}"/>
+                <a16:creationId xmlns:a16="http://schemas.microsoft.com/office/drawing/2014/main" id="{CD86CB1C-9CE5-4893-995F-D991433F211D}"/>
               </a:ext>
             </a:extLst>
           </p:cNvPr>
@@ -7516,7 +7516,7 @@
           <p:cNvPr id="15" name="">
             <a:extLst xmlns:a="http://schemas.openxmlformats.org/drawingml/2006/main">
               <a:ext uri="{FF2B5EF4-FFF2-40B4-BE49-F238E27FC236}">
-                <a16:creationId xmlns:a16="http://schemas.microsoft.com/office/drawing/2014/main" id="{88EC0382-BFE8-4312-A785-C69BA416F1EA}"/>
+                <a16:creationId xmlns:a16="http://schemas.microsoft.com/office/drawing/2014/main" id="{1F33E6D5-5ECE-408F-823A-F9FA8CBDC4D2}"/>
               </a:ext>
             </a:extLst>
           </p:cNvPr>
@@ -7571,7 +7571,7 @@
     </p:spTree>
     <p:extLst>
       <p:ext uri="{BB962C8B-B14F-4D97-AF65-F5344CB8AC3E}">
-        <p14:creationId xmlns:p14="http://schemas.microsoft.com/office/powerpoint/2010/main" val="1341448367"/>
+        <p14:creationId xmlns:p14="http://schemas.microsoft.com/office/powerpoint/2010/main" val="1818261775"/>
       </p:ext>
     </p:extLst>
   </p:cSld>
@@ -7772,7 +7772,7 @@
           <p:cNvPr id="23" name="">
             <a:extLst xmlns:a="http://schemas.openxmlformats.org/drawingml/2006/main">
               <a:ext uri="{FF2B5EF4-FFF2-40B4-BE49-F238E27FC236}">
-                <a16:creationId xmlns:a16="http://schemas.microsoft.com/office/drawing/2014/main" id="{B060BEE2-ED79-4D13-8321-6038336D405D}"/>
+                <a16:creationId xmlns:a16="http://schemas.microsoft.com/office/drawing/2014/main" id="{312EAA12-0F26-496B-B5A7-2B157A0E4EA2}"/>
               </a:ext>
             </a:extLst>
           </p:cNvPr>
@@ -7804,7 +7804,7 @@
           <p:cNvPr id="2" name="">
             <a:extLst xmlns:a="http://schemas.openxmlformats.org/drawingml/2006/main">
               <a:ext uri="{FF2B5EF4-FFF2-40B4-BE49-F238E27FC236}">
-                <a16:creationId xmlns:a16="http://schemas.microsoft.com/office/drawing/2014/main" id="{57ECCFE5-A241-4869-8B06-668A96741028}"/>
+                <a16:creationId xmlns:a16="http://schemas.microsoft.com/office/drawing/2014/main" id="{0A375F2B-8C02-4696-8B41-D7208E6859FA}"/>
               </a:ext>
             </a:extLst>
           </p:cNvPr>
@@ -7861,7 +7861,7 @@
           <p:cNvPr id="3" name="">
             <a:extLst xmlns:a="http://schemas.openxmlformats.org/drawingml/2006/main">
               <a:ext uri="{FF2B5EF4-FFF2-40B4-BE49-F238E27FC236}">
-                <a16:creationId xmlns:a16="http://schemas.microsoft.com/office/drawing/2014/main" id="{1C43E716-F7F0-4714-88E2-41163595DB44}"/>
+                <a16:creationId xmlns:a16="http://schemas.microsoft.com/office/drawing/2014/main" id="{02D1F3AD-875D-4B79-8AAE-5A1960C0C51E}"/>
               </a:ext>
             </a:extLst>
           </p:cNvPr>
@@ -7893,7 +7893,7 @@
           <p:cNvPr id="4" name="">
             <a:extLst xmlns:a="http://schemas.openxmlformats.org/drawingml/2006/main">
               <a:ext uri="{FF2B5EF4-FFF2-40B4-BE49-F238E27FC236}">
-                <a16:creationId xmlns:a16="http://schemas.microsoft.com/office/drawing/2014/main" id="{769DD30C-4F20-4375-B532-D122AABF7499}"/>
+                <a16:creationId xmlns:a16="http://schemas.microsoft.com/office/drawing/2014/main" id="{D9E20C6A-F685-496D-A9C5-43EA562B84B9}"/>
               </a:ext>
             </a:extLst>
           </p:cNvPr>
@@ -7950,7 +7950,7 @@
           <p:cNvPr id="5" name="">
             <a:extLst xmlns:a="http://schemas.openxmlformats.org/drawingml/2006/main">
               <a:ext uri="{FF2B5EF4-FFF2-40B4-BE49-F238E27FC236}">
-                <a16:creationId xmlns:a16="http://schemas.microsoft.com/office/drawing/2014/main" id="{1E9AEFB5-199F-41E3-ACA2-73DC6C3E2608}"/>
+                <a16:creationId xmlns:a16="http://schemas.microsoft.com/office/drawing/2014/main" id="{5F363F5D-5995-474A-B5F3-727843E51013}"/>
               </a:ext>
             </a:extLst>
           </p:cNvPr>
@@ -8007,7 +8007,7 @@
           <p:cNvPr id="6" name="">
             <a:extLst xmlns:a="http://schemas.openxmlformats.org/drawingml/2006/main">
               <a:ext uri="{FF2B5EF4-FFF2-40B4-BE49-F238E27FC236}">
-                <a16:creationId xmlns:a16="http://schemas.microsoft.com/office/drawing/2014/main" id="{50645171-C15A-4E3C-AD9C-A17A5B812A1F}"/>
+                <a16:creationId xmlns:a16="http://schemas.microsoft.com/office/drawing/2014/main" id="{D67D8023-B0A3-4C1F-A2F9-641677B4D7A3}"/>
               </a:ext>
             </a:extLst>
           </p:cNvPr>
@@ -8064,7 +8064,7 @@
           <p:cNvPr id="7" name="">
             <a:extLst xmlns:a="http://schemas.openxmlformats.org/drawingml/2006/main">
               <a:ext uri="{FF2B5EF4-FFF2-40B4-BE49-F238E27FC236}">
-                <a16:creationId xmlns:a16="http://schemas.microsoft.com/office/drawing/2014/main" id="{4C8222BC-CA69-4F4C-9580-4EE446A66918}"/>
+                <a16:creationId xmlns:a16="http://schemas.microsoft.com/office/drawing/2014/main" id="{A96E2F4A-03CC-4B9B-BEFF-B49B726E32B9}"/>
               </a:ext>
             </a:extLst>
           </p:cNvPr>
@@ -8096,7 +8096,7 @@
           <p:cNvPr id="8" name="">
             <a:extLst xmlns:a="http://schemas.openxmlformats.org/drawingml/2006/main">
               <a:ext uri="{FF2B5EF4-FFF2-40B4-BE49-F238E27FC236}">
-                <a16:creationId xmlns:a16="http://schemas.microsoft.com/office/drawing/2014/main" id="{BDA9765D-E8AF-413B-80B1-0F2299632CAF}"/>
+                <a16:creationId xmlns:a16="http://schemas.microsoft.com/office/drawing/2014/main" id="{6FA3C429-4ACE-4240-BAB1-8996A4D146D9}"/>
               </a:ext>
             </a:extLst>
           </p:cNvPr>
@@ -8153,7 +8153,7 @@
           <p:cNvPr id="9" name="">
             <a:extLst xmlns:a="http://schemas.openxmlformats.org/drawingml/2006/main">
               <a:ext uri="{FF2B5EF4-FFF2-40B4-BE49-F238E27FC236}">
-                <a16:creationId xmlns:a16="http://schemas.microsoft.com/office/drawing/2014/main" id="{00A09272-0867-43CA-A986-5226AC16C8A6}"/>
+                <a16:creationId xmlns:a16="http://schemas.microsoft.com/office/drawing/2014/main" id="{A93EB7AB-D7A2-4326-97CC-239E356231D8}"/>
               </a:ext>
             </a:extLst>
           </p:cNvPr>
@@ -8210,19 +8210,19 @@
           <p:cNvPr id="10" name="">
             <a:extLst xmlns:a="http://schemas.openxmlformats.org/drawingml/2006/main">
               <a:ext uri="{FF2B5EF4-FFF2-40B4-BE49-F238E27FC236}">
-                <a16:creationId xmlns:a16="http://schemas.microsoft.com/office/drawing/2014/main" id="{801E09A3-8B98-42B8-BA90-92CC38E81014}"/>
-              </a:ext>
-            </a:extLst>
-          </p:cNvPr>
-          <p:cNvSpPr>
-            <a:spLocks xmlns:a="http://schemas.openxmlformats.org/drawingml/2006/main" noGrp="1"/>
-          </p:cNvSpPr>
-          <p:nvPr/>
-        </p:nvSpPr>
-        <p:spPr>
-          <a:xfrm xmlns:a="http://schemas.openxmlformats.org/drawingml/2006/main">
-            <a:off x="914400" y="1257300"/>
-            <a:ext cx="10363200" cy="781050"/>
+                <a16:creationId xmlns:a16="http://schemas.microsoft.com/office/drawing/2014/main" id="{E5D89B33-F103-4BBA-AEBF-A5A5DB096490}"/>
+              </a:ext>
+            </a:extLst>
+          </p:cNvPr>
+          <p:cNvSpPr>
+            <a:spLocks xmlns:a="http://schemas.openxmlformats.org/drawingml/2006/main" noGrp="1"/>
+          </p:cNvSpPr>
+          <p:nvPr/>
+        </p:nvSpPr>
+        <p:spPr>
+          <a:xfrm xmlns:a="http://schemas.openxmlformats.org/drawingml/2006/main">
+            <a:off x="857250" y="1219200"/>
+            <a:ext cx="10477500" cy="742950"/>
           </a:xfrm>
           <a:prstGeom xmlns:a="http://schemas.openxmlformats.org/drawingml/2006/main" prst="rect">
             <a:avLst/>
@@ -8239,7 +8239,7 @@
           <a:lstStyle xmlns:a="http://schemas.openxmlformats.org/drawingml/2006/main"/>
           <a:p xmlns:a="http://schemas.openxmlformats.org/drawingml/2006/main">
             <a:pPr algn="ctr">
-              <a:defRPr sz="2175" b="1">
+              <a:defRPr sz="2100" b="1">
                 <a:solidFill>
                   <a:srgbClr val="17253A"/>
                 </a:solidFill>
@@ -8249,7 +8249,7 @@
               </a:defRPr>
             </a:pPr>
             <a:r>
-              <a:rPr sz="2175" b="1">
+              <a:rPr sz="2100" b="1">
                 <a:solidFill>
                   <a:srgbClr val="17253A"/>
                 </a:solidFill>
@@ -8267,28 +8267,30 @@
           <p:cNvPr id="11" name="">
             <a:extLst xmlns:a="http://schemas.openxmlformats.org/drawingml/2006/main">
               <a:ext uri="{FF2B5EF4-FFF2-40B4-BE49-F238E27FC236}">
-                <a16:creationId xmlns:a16="http://schemas.microsoft.com/office/drawing/2014/main" id="{B168E413-672E-489B-8964-1C2026BF97D3}"/>
-              </a:ext>
-            </a:extLst>
-          </p:cNvPr>
-          <p:cNvSpPr>
-            <a:spLocks xmlns:a="http://schemas.openxmlformats.org/drawingml/2006/main" noGrp="1"/>
-          </p:cNvSpPr>
-          <p:nvPr/>
-        </p:nvSpPr>
-        <p:spPr>
-          <a:xfrm xmlns:a="http://schemas.openxmlformats.org/drawingml/2006/main">
-            <a:off x="1000125" y="2247900"/>
-            <a:ext cx="476250" cy="476250"/>
-          </a:xfrm>
-          <a:prstGeom xmlns:a="http://schemas.openxmlformats.org/drawingml/2006/main" prst="ellipse">
+                <a16:creationId xmlns:a16="http://schemas.microsoft.com/office/drawing/2014/main" id="{BBE80D4F-14C9-4D64-BAEE-F2B25362DAC9}"/>
+              </a:ext>
+            </a:extLst>
+          </p:cNvPr>
+          <p:cNvSpPr>
+            <a:spLocks xmlns:a="http://schemas.openxmlformats.org/drawingml/2006/main" noGrp="1"/>
+          </p:cNvSpPr>
+          <p:nvPr/>
+        </p:nvSpPr>
+        <p:spPr>
+          <a:xfrm xmlns:a="http://schemas.openxmlformats.org/drawingml/2006/main">
+            <a:off x="971550" y="2124075"/>
+            <a:ext cx="38100" cy="3524250"/>
+          </a:xfrm>
+          <a:prstGeom xmlns:a="http://schemas.openxmlformats.org/drawingml/2006/main" prst="rect">
             <a:avLst/>
           </a:prstGeom>
           <a:solidFill xmlns:a="http://schemas.openxmlformats.org/drawingml/2006/main">
-            <a:srgbClr val="18324A"/>
+            <a:srgbClr val="2C6E73"/>
           </a:solidFill>
           <a:ln xmlns:a="http://schemas.openxmlformats.org/drawingml/2006/main" w="0">
-            <a:noFill/>
+            <a:solidFill>
+              <a:srgbClr val="2C6E73"/>
+            </a:solidFill>
           </a:ln>
         </p:spPr>
       </p:sp>
@@ -8297,19 +8299,19 @@
           <p:cNvPr id="12" name="">
             <a:extLst xmlns:a="http://schemas.openxmlformats.org/drawingml/2006/main">
               <a:ext uri="{FF2B5EF4-FFF2-40B4-BE49-F238E27FC236}">
-                <a16:creationId xmlns:a16="http://schemas.microsoft.com/office/drawing/2014/main" id="{72E9ACED-C4F9-445F-84D6-4CBA8178C6A8}"/>
-              </a:ext>
-            </a:extLst>
-          </p:cNvPr>
-          <p:cNvSpPr>
-            <a:spLocks xmlns:a="http://schemas.openxmlformats.org/drawingml/2006/main" noGrp="1"/>
-          </p:cNvSpPr>
-          <p:nvPr/>
-        </p:nvSpPr>
-        <p:spPr>
-          <a:xfrm xmlns:a="http://schemas.openxmlformats.org/drawingml/2006/main">
-            <a:off x="1000125" y="2276475"/>
-            <a:ext cx="476250" cy="419100"/>
+                <a16:creationId xmlns:a16="http://schemas.microsoft.com/office/drawing/2014/main" id="{CD0F40D9-9CC4-4A8B-8D75-975B3ECDC20E}"/>
+              </a:ext>
+            </a:extLst>
+          </p:cNvPr>
+          <p:cNvSpPr>
+            <a:spLocks xmlns:a="http://schemas.openxmlformats.org/drawingml/2006/main" noGrp="1"/>
+          </p:cNvSpPr>
+          <p:nvPr/>
+        </p:nvSpPr>
+        <p:spPr>
+          <a:xfrm xmlns:a="http://schemas.openxmlformats.org/drawingml/2006/main">
+            <a:off x="1162050" y="2200275"/>
+            <a:ext cx="400050" cy="400050"/>
           </a:xfrm>
           <a:prstGeom xmlns:a="http://schemas.openxmlformats.org/drawingml/2006/main" prst="rect">
             <a:avLst/>
@@ -8326,9 +8328,9 @@
           <a:lstStyle xmlns:a="http://schemas.openxmlformats.org/drawingml/2006/main"/>
           <a:p xmlns:a="http://schemas.openxmlformats.org/drawingml/2006/main">
             <a:pPr algn="ctr">
-              <a:defRPr sz="1350" b="1">
-                <a:solidFill>
-                  <a:srgbClr val="FFFFFF"/>
+              <a:defRPr sz="1125" b="1">
+                <a:solidFill>
+                  <a:srgbClr val="2C6E73"/>
                 </a:solidFill>
                 <a:latin typeface="Arial"/>
                 <a:ea typeface="Arial"/>
@@ -8336,9 +8338,9 @@
               </a:defRPr>
             </a:pPr>
             <a:r>
-              <a:rPr sz="1350" b="1">
-                <a:solidFill>
-                  <a:srgbClr val="FFFFFF"/>
+              <a:rPr sz="1125" b="1">
+                <a:solidFill>
+                  <a:srgbClr val="2C6E73"/>
                 </a:solidFill>
                 <a:latin typeface="Arial"/>
                 <a:ea typeface="Arial"/>
@@ -8354,19 +8356,19 @@
           <p:cNvPr id="13" name="">
             <a:extLst xmlns:a="http://schemas.openxmlformats.org/drawingml/2006/main">
               <a:ext uri="{FF2B5EF4-FFF2-40B4-BE49-F238E27FC236}">
-                <a16:creationId xmlns:a16="http://schemas.microsoft.com/office/drawing/2014/main" id="{AF34CA80-D5DA-41AD-99EF-0EFDB88C9A8C}"/>
-              </a:ext>
-            </a:extLst>
-          </p:cNvPr>
-          <p:cNvSpPr>
-            <a:spLocks xmlns:a="http://schemas.openxmlformats.org/drawingml/2006/main" noGrp="1"/>
-          </p:cNvSpPr>
-          <p:nvPr/>
-        </p:nvSpPr>
-        <p:spPr>
-          <a:xfrm xmlns:a="http://schemas.openxmlformats.org/drawingml/2006/main">
-            <a:off x="1714500" y="2181225"/>
-            <a:ext cx="9429750" cy="609600"/>
+                <a16:creationId xmlns:a16="http://schemas.microsoft.com/office/drawing/2014/main" id="{66D8A132-8964-4872-8BED-F937FAF0568E}"/>
+              </a:ext>
+            </a:extLst>
+          </p:cNvPr>
+          <p:cNvSpPr>
+            <a:spLocks xmlns:a="http://schemas.openxmlformats.org/drawingml/2006/main" noGrp="1"/>
+          </p:cNvSpPr>
+          <p:nvPr/>
+        </p:nvSpPr>
+        <p:spPr>
+          <a:xfrm xmlns:a="http://schemas.openxmlformats.org/drawingml/2006/main">
+            <a:off x="1714500" y="2114550"/>
+            <a:ext cx="9525000" cy="809625"/>
           </a:xfrm>
           <a:prstGeom xmlns:a="http://schemas.openxmlformats.org/drawingml/2006/main" prst="rect">
             <a:avLst/>
@@ -8383,7 +8385,7 @@
           <a:lstStyle xmlns:a="http://schemas.openxmlformats.org/drawingml/2006/main"/>
           <a:p xmlns:a="http://schemas.openxmlformats.org/drawingml/2006/main">
             <a:pPr algn="l">
-              <a:defRPr sz="1500" b="0">
+              <a:defRPr sz="1725" b="0">
                 <a:solidFill>
                   <a:srgbClr val="17253A"/>
                 </a:solidFill>
@@ -8393,7 +8395,7 @@
               </a:defRPr>
             </a:pPr>
             <a:r>
-              <a:rPr sz="1500" b="0">
+              <a:rPr sz="1725" b="0">
                 <a:solidFill>
                   <a:srgbClr val="17253A"/>
                 </a:solidFill>
@@ -8401,7 +8403,7 @@
                 <a:ea typeface="Arial"/>
                 <a:cs typeface="Arial"/>
               </a:rPr>
-              <a:t>Identify the structure: Identify brackets and multiplication or division before calculating.</a:t>
+              <a:t>18 + 6 × 7</a:t>
             </a:r>
           </a:p>
         </p:txBody>
@@ -8411,28 +8413,30 @@
           <p:cNvPr id="14" name="">
             <a:extLst xmlns:a="http://schemas.openxmlformats.org/drawingml/2006/main">
               <a:ext uri="{FF2B5EF4-FFF2-40B4-BE49-F238E27FC236}">
-                <a16:creationId xmlns:a16="http://schemas.microsoft.com/office/drawing/2014/main" id="{2F255BDE-482B-4698-8C6A-B551F7A47441}"/>
-              </a:ext>
-            </a:extLst>
-          </p:cNvPr>
-          <p:cNvSpPr>
-            <a:spLocks xmlns:a="http://schemas.openxmlformats.org/drawingml/2006/main" noGrp="1"/>
-          </p:cNvSpPr>
-          <p:nvPr/>
-        </p:nvSpPr>
-        <p:spPr>
-          <a:xfrm xmlns:a="http://schemas.openxmlformats.org/drawingml/2006/main">
-            <a:off x="1000125" y="2990850"/>
-            <a:ext cx="476250" cy="476250"/>
-          </a:xfrm>
-          <a:prstGeom xmlns:a="http://schemas.openxmlformats.org/drawingml/2006/main" prst="ellipse">
+                <a16:creationId xmlns:a16="http://schemas.microsoft.com/office/drawing/2014/main" id="{716A9F48-5B5D-4293-AC56-E064B9EE354A}"/>
+              </a:ext>
+            </a:extLst>
+          </p:cNvPr>
+          <p:cNvSpPr>
+            <a:spLocks xmlns:a="http://schemas.openxmlformats.org/drawingml/2006/main" noGrp="1"/>
+          </p:cNvSpPr>
+          <p:nvPr/>
+        </p:nvSpPr>
+        <p:spPr>
+          <a:xfrm xmlns:a="http://schemas.openxmlformats.org/drawingml/2006/main">
+            <a:off x="1714500" y="2943225"/>
+            <a:ext cx="9334500" cy="9525"/>
+          </a:xfrm>
+          <a:prstGeom xmlns:a="http://schemas.openxmlformats.org/drawingml/2006/main" prst="rect">
             <a:avLst/>
           </a:prstGeom>
           <a:solidFill xmlns:a="http://schemas.openxmlformats.org/drawingml/2006/main">
-            <a:srgbClr val="2C6E73"/>
+            <a:srgbClr val="D9E0E6"/>
           </a:solidFill>
           <a:ln xmlns:a="http://schemas.openxmlformats.org/drawingml/2006/main" w="0">
-            <a:noFill/>
+            <a:solidFill>
+              <a:srgbClr val="D9E0E6"/>
+            </a:solidFill>
           </a:ln>
         </p:spPr>
       </p:sp>
@@ -8441,19 +8445,19 @@
           <p:cNvPr id="15" name="">
             <a:extLst xmlns:a="http://schemas.openxmlformats.org/drawingml/2006/main">
               <a:ext uri="{FF2B5EF4-FFF2-40B4-BE49-F238E27FC236}">
-                <a16:creationId xmlns:a16="http://schemas.microsoft.com/office/drawing/2014/main" id="{157ABF0C-5109-495F-A0CD-BC762B048528}"/>
-              </a:ext>
-            </a:extLst>
-          </p:cNvPr>
-          <p:cNvSpPr>
-            <a:spLocks xmlns:a="http://schemas.openxmlformats.org/drawingml/2006/main" noGrp="1"/>
-          </p:cNvSpPr>
-          <p:nvPr/>
-        </p:nvSpPr>
-        <p:spPr>
-          <a:xfrm xmlns:a="http://schemas.openxmlformats.org/drawingml/2006/main">
-            <a:off x="1000125" y="3019425"/>
-            <a:ext cx="476250" cy="419100"/>
+                <a16:creationId xmlns:a16="http://schemas.microsoft.com/office/drawing/2014/main" id="{0907DD8C-8771-4650-B486-609969330E45}"/>
+              </a:ext>
+            </a:extLst>
+          </p:cNvPr>
+          <p:cNvSpPr>
+            <a:spLocks xmlns:a="http://schemas.openxmlformats.org/drawingml/2006/main" noGrp="1"/>
+          </p:cNvSpPr>
+          <p:nvPr/>
+        </p:nvSpPr>
+        <p:spPr>
+          <a:xfrm xmlns:a="http://schemas.openxmlformats.org/drawingml/2006/main">
+            <a:off x="1162050" y="3076575"/>
+            <a:ext cx="400050" cy="400050"/>
           </a:xfrm>
           <a:prstGeom xmlns:a="http://schemas.openxmlformats.org/drawingml/2006/main" prst="rect">
             <a:avLst/>
@@ -8470,9 +8474,9 @@
           <a:lstStyle xmlns:a="http://schemas.openxmlformats.org/drawingml/2006/main"/>
           <a:p xmlns:a="http://schemas.openxmlformats.org/drawingml/2006/main">
             <a:pPr algn="ctr">
-              <a:defRPr sz="1350" b="1">
-                <a:solidFill>
-                  <a:srgbClr val="FFFFFF"/>
+              <a:defRPr sz="1125" b="1">
+                <a:solidFill>
+                  <a:srgbClr val="2C6E73"/>
                 </a:solidFill>
                 <a:latin typeface="Arial"/>
                 <a:ea typeface="Arial"/>
@@ -8480,9 +8484,9 @@
               </a:defRPr>
             </a:pPr>
             <a:r>
-              <a:rPr sz="1350" b="1">
-                <a:solidFill>
-                  <a:srgbClr val="FFFFFF"/>
+              <a:rPr sz="1125" b="1">
+                <a:solidFill>
+                  <a:srgbClr val="2C6E73"/>
                 </a:solidFill>
                 <a:latin typeface="Arial"/>
                 <a:ea typeface="Arial"/>
@@ -8498,19 +8502,19 @@
           <p:cNvPr id="16" name="">
             <a:extLst xmlns:a="http://schemas.openxmlformats.org/drawingml/2006/main">
               <a:ext uri="{FF2B5EF4-FFF2-40B4-BE49-F238E27FC236}">
-                <a16:creationId xmlns:a16="http://schemas.microsoft.com/office/drawing/2014/main" id="{D6424843-18C5-4429-AD9B-5D84F2FB5132}"/>
-              </a:ext>
-            </a:extLst>
-          </p:cNvPr>
-          <p:cNvSpPr>
-            <a:spLocks xmlns:a="http://schemas.openxmlformats.org/drawingml/2006/main" noGrp="1"/>
-          </p:cNvSpPr>
-          <p:nvPr/>
-        </p:nvSpPr>
-        <p:spPr>
-          <a:xfrm xmlns:a="http://schemas.openxmlformats.org/drawingml/2006/main">
-            <a:off x="1714500" y="2924175"/>
-            <a:ext cx="9429750" cy="609600"/>
+                <a16:creationId xmlns:a16="http://schemas.microsoft.com/office/drawing/2014/main" id="{A033B18D-AC97-49A6-A5EB-280DE229051B}"/>
+              </a:ext>
+            </a:extLst>
+          </p:cNvPr>
+          <p:cNvSpPr>
+            <a:spLocks xmlns:a="http://schemas.openxmlformats.org/drawingml/2006/main" noGrp="1"/>
+          </p:cNvSpPr>
+          <p:nvPr/>
+        </p:nvSpPr>
+        <p:spPr>
+          <a:xfrm xmlns:a="http://schemas.openxmlformats.org/drawingml/2006/main">
+            <a:off x="1714500" y="2990850"/>
+            <a:ext cx="9525000" cy="809625"/>
           </a:xfrm>
           <a:prstGeom xmlns:a="http://schemas.openxmlformats.org/drawingml/2006/main" prst="rect">
             <a:avLst/>
@@ -8527,7 +8531,7 @@
           <a:lstStyle xmlns:a="http://schemas.openxmlformats.org/drawingml/2006/main"/>
           <a:p xmlns:a="http://schemas.openxmlformats.org/drawingml/2006/main">
             <a:pPr algn="l">
-              <a:defRPr sz="1500" b="0">
+              <a:defRPr sz="1725" b="0">
                 <a:solidFill>
                   <a:srgbClr val="17253A"/>
                 </a:solidFill>
@@ -8537,7 +8541,7 @@
               </a:defRPr>
             </a:pPr>
             <a:r>
-              <a:rPr sz="1500" b="0">
+              <a:rPr sz="1725" b="0">
                 <a:solidFill>
                   <a:srgbClr val="17253A"/>
                 </a:solidFill>
@@ -8545,7 +8549,7 @@
                 <a:ea typeface="Arial"/>
                 <a:cs typeface="Arial"/>
               </a:rPr>
-              <a:t>Set up the method: Work through operations of equal priority from left to right.</a:t>
+              <a:t>6 × 7 = 42</a:t>
             </a:r>
           </a:p>
         </p:txBody>
@@ -8555,28 +8559,30 @@
           <p:cNvPr id="17" name="">
             <a:extLst xmlns:a="http://schemas.openxmlformats.org/drawingml/2006/main">
               <a:ext uri="{FF2B5EF4-FFF2-40B4-BE49-F238E27FC236}">
-                <a16:creationId xmlns:a16="http://schemas.microsoft.com/office/drawing/2014/main" id="{395836F1-DCDA-4322-8D23-3B9096D67B0B}"/>
-              </a:ext>
-            </a:extLst>
-          </p:cNvPr>
-          <p:cNvSpPr>
-            <a:spLocks xmlns:a="http://schemas.openxmlformats.org/drawingml/2006/main" noGrp="1"/>
-          </p:cNvSpPr>
-          <p:nvPr/>
-        </p:nvSpPr>
-        <p:spPr>
-          <a:xfrm xmlns:a="http://schemas.openxmlformats.org/drawingml/2006/main">
-            <a:off x="1000125" y="3733800"/>
-            <a:ext cx="476250" cy="476250"/>
-          </a:xfrm>
-          <a:prstGeom xmlns:a="http://schemas.openxmlformats.org/drawingml/2006/main" prst="ellipse">
+                <a16:creationId xmlns:a16="http://schemas.microsoft.com/office/drawing/2014/main" id="{BD99C0EF-D735-4029-8282-3A88354811E3}"/>
+              </a:ext>
+            </a:extLst>
+          </p:cNvPr>
+          <p:cNvSpPr>
+            <a:spLocks xmlns:a="http://schemas.openxmlformats.org/drawingml/2006/main" noGrp="1"/>
+          </p:cNvSpPr>
+          <p:nvPr/>
+        </p:nvSpPr>
+        <p:spPr>
+          <a:xfrm xmlns:a="http://schemas.openxmlformats.org/drawingml/2006/main">
+            <a:off x="1714500" y="3819525"/>
+            <a:ext cx="9334500" cy="9525"/>
+          </a:xfrm>
+          <a:prstGeom xmlns:a="http://schemas.openxmlformats.org/drawingml/2006/main" prst="rect">
             <a:avLst/>
           </a:prstGeom>
           <a:solidFill xmlns:a="http://schemas.openxmlformats.org/drawingml/2006/main">
-            <a:srgbClr val="2C6E73"/>
+            <a:srgbClr val="D9E0E6"/>
           </a:solidFill>
           <a:ln xmlns:a="http://schemas.openxmlformats.org/drawingml/2006/main" w="0">
-            <a:noFill/>
+            <a:solidFill>
+              <a:srgbClr val="D9E0E6"/>
+            </a:solidFill>
           </a:ln>
         </p:spPr>
       </p:sp>
@@ -8585,19 +8591,19 @@
           <p:cNvPr id="18" name="">
             <a:extLst xmlns:a="http://schemas.openxmlformats.org/drawingml/2006/main">
               <a:ext uri="{FF2B5EF4-FFF2-40B4-BE49-F238E27FC236}">
-                <a16:creationId xmlns:a16="http://schemas.microsoft.com/office/drawing/2014/main" id="{33A3C8A7-7CA3-43B2-ABF4-B37DB79C3DF9}"/>
-              </a:ext>
-            </a:extLst>
-          </p:cNvPr>
-          <p:cNvSpPr>
-            <a:spLocks xmlns:a="http://schemas.openxmlformats.org/drawingml/2006/main" noGrp="1"/>
-          </p:cNvSpPr>
-          <p:nvPr/>
-        </p:nvSpPr>
-        <p:spPr>
-          <a:xfrm xmlns:a="http://schemas.openxmlformats.org/drawingml/2006/main">
-            <a:off x="1000125" y="3762375"/>
-            <a:ext cx="476250" cy="419100"/>
+                <a16:creationId xmlns:a16="http://schemas.microsoft.com/office/drawing/2014/main" id="{C6334CAC-4B5C-4C34-8FFE-F8C40E053794}"/>
+              </a:ext>
+            </a:extLst>
+          </p:cNvPr>
+          <p:cNvSpPr>
+            <a:spLocks xmlns:a="http://schemas.openxmlformats.org/drawingml/2006/main" noGrp="1"/>
+          </p:cNvSpPr>
+          <p:nvPr/>
+        </p:nvSpPr>
+        <p:spPr>
+          <a:xfrm xmlns:a="http://schemas.openxmlformats.org/drawingml/2006/main">
+            <a:off x="1162050" y="3952875"/>
+            <a:ext cx="400050" cy="400050"/>
           </a:xfrm>
           <a:prstGeom xmlns:a="http://schemas.openxmlformats.org/drawingml/2006/main" prst="rect">
             <a:avLst/>
@@ -8614,9 +8620,9 @@
           <a:lstStyle xmlns:a="http://schemas.openxmlformats.org/drawingml/2006/main"/>
           <a:p xmlns:a="http://schemas.openxmlformats.org/drawingml/2006/main">
             <a:pPr algn="ctr">
-              <a:defRPr sz="1350" b="1">
-                <a:solidFill>
-                  <a:srgbClr val="FFFFFF"/>
+              <a:defRPr sz="1125" b="1">
+                <a:solidFill>
+                  <a:srgbClr val="2C6E73"/>
                 </a:solidFill>
                 <a:latin typeface="Arial"/>
                 <a:ea typeface="Arial"/>
@@ -8624,9 +8630,9 @@
               </a:defRPr>
             </a:pPr>
             <a:r>
-              <a:rPr sz="1350" b="1">
-                <a:solidFill>
-                  <a:srgbClr val="FFFFFF"/>
+              <a:rPr sz="1125" b="1">
+                <a:solidFill>
+                  <a:srgbClr val="2C6E73"/>
                 </a:solidFill>
                 <a:latin typeface="Arial"/>
                 <a:ea typeface="Arial"/>
@@ -8642,19 +8648,19 @@
           <p:cNvPr id="19" name="">
             <a:extLst xmlns:a="http://schemas.openxmlformats.org/drawingml/2006/main">
               <a:ext uri="{FF2B5EF4-FFF2-40B4-BE49-F238E27FC236}">
-                <a16:creationId xmlns:a16="http://schemas.microsoft.com/office/drawing/2014/main" id="{59BD40B6-519E-4FF9-97E1-6162EF9925E2}"/>
-              </a:ext>
-            </a:extLst>
-          </p:cNvPr>
-          <p:cNvSpPr>
-            <a:spLocks xmlns:a="http://schemas.openxmlformats.org/drawingml/2006/main" noGrp="1"/>
-          </p:cNvSpPr>
-          <p:nvPr/>
-        </p:nvSpPr>
-        <p:spPr>
-          <a:xfrm xmlns:a="http://schemas.openxmlformats.org/drawingml/2006/main">
-            <a:off x="1714500" y="3667125"/>
-            <a:ext cx="9429750" cy="609600"/>
+                <a16:creationId xmlns:a16="http://schemas.microsoft.com/office/drawing/2014/main" id="{203689FB-928B-4389-B0C8-F8FCCDDB8DAC}"/>
+              </a:ext>
+            </a:extLst>
+          </p:cNvPr>
+          <p:cNvSpPr>
+            <a:spLocks xmlns:a="http://schemas.openxmlformats.org/drawingml/2006/main" noGrp="1"/>
+          </p:cNvSpPr>
+          <p:nvPr/>
+        </p:nvSpPr>
+        <p:spPr>
+          <a:xfrm xmlns:a="http://schemas.openxmlformats.org/drawingml/2006/main">
+            <a:off x="1714500" y="3867150"/>
+            <a:ext cx="9525000" cy="809625"/>
           </a:xfrm>
           <a:prstGeom xmlns:a="http://schemas.openxmlformats.org/drawingml/2006/main" prst="rect">
             <a:avLst/>
@@ -8671,7 +8677,7 @@
           <a:lstStyle xmlns:a="http://schemas.openxmlformats.org/drawingml/2006/main"/>
           <a:p xmlns:a="http://schemas.openxmlformats.org/drawingml/2006/main">
             <a:pPr algn="l">
-              <a:defRPr sz="1500" b="0">
+              <a:defRPr sz="1725" b="0">
                 <a:solidFill>
                   <a:srgbClr val="17253A"/>
                 </a:solidFill>
@@ -8681,7 +8687,7 @@
               </a:defRPr>
             </a:pPr>
             <a:r>
-              <a:rPr sz="1500" b="0">
+              <a:rPr sz="1725" b="0">
                 <a:solidFill>
                   <a:srgbClr val="17253A"/>
                 </a:solidFill>
@@ -8689,7 +8695,7 @@
                 <a:ea typeface="Arial"/>
                 <a:cs typeface="Arial"/>
               </a:rPr>
-              <a:t>Complete the calculation: 60.</a:t>
+              <a:t>18 + 42</a:t>
             </a:r>
           </a:p>
         </p:txBody>
@@ -8699,28 +8705,30 @@
           <p:cNvPr id="20" name="">
             <a:extLst xmlns:a="http://schemas.openxmlformats.org/drawingml/2006/main">
               <a:ext uri="{FF2B5EF4-FFF2-40B4-BE49-F238E27FC236}">
-                <a16:creationId xmlns:a16="http://schemas.microsoft.com/office/drawing/2014/main" id="{1716C222-256C-455B-80F3-E419782417E2}"/>
-              </a:ext>
-            </a:extLst>
-          </p:cNvPr>
-          <p:cNvSpPr>
-            <a:spLocks xmlns:a="http://schemas.openxmlformats.org/drawingml/2006/main" noGrp="1"/>
-          </p:cNvSpPr>
-          <p:nvPr/>
-        </p:nvSpPr>
-        <p:spPr>
-          <a:xfrm xmlns:a="http://schemas.openxmlformats.org/drawingml/2006/main">
-            <a:off x="1000125" y="4476750"/>
-            <a:ext cx="476250" cy="476250"/>
-          </a:xfrm>
-          <a:prstGeom xmlns:a="http://schemas.openxmlformats.org/drawingml/2006/main" prst="ellipse">
+                <a16:creationId xmlns:a16="http://schemas.microsoft.com/office/drawing/2014/main" id="{E7A2A978-1622-4836-856E-4C95271D51F3}"/>
+              </a:ext>
+            </a:extLst>
+          </p:cNvPr>
+          <p:cNvSpPr>
+            <a:spLocks xmlns:a="http://schemas.openxmlformats.org/drawingml/2006/main" noGrp="1"/>
+          </p:cNvSpPr>
+          <p:nvPr/>
+        </p:nvSpPr>
+        <p:spPr>
+          <a:xfrm xmlns:a="http://schemas.openxmlformats.org/drawingml/2006/main">
+            <a:off x="1714500" y="4695825"/>
+            <a:ext cx="9334500" cy="9525"/>
+          </a:xfrm>
+          <a:prstGeom xmlns:a="http://schemas.openxmlformats.org/drawingml/2006/main" prst="rect">
             <a:avLst/>
           </a:prstGeom>
           <a:solidFill xmlns:a="http://schemas.openxmlformats.org/drawingml/2006/main">
-            <a:srgbClr val="2C6E73"/>
+            <a:srgbClr val="D9E0E6"/>
           </a:solidFill>
           <a:ln xmlns:a="http://schemas.openxmlformats.org/drawingml/2006/main" w="0">
-            <a:noFill/>
+            <a:solidFill>
+              <a:srgbClr val="D9E0E6"/>
+            </a:solidFill>
           </a:ln>
         </p:spPr>
       </p:sp>
@@ -8729,19 +8737,19 @@
           <p:cNvPr id="21" name="">
             <a:extLst xmlns:a="http://schemas.openxmlformats.org/drawingml/2006/main">
               <a:ext uri="{FF2B5EF4-FFF2-40B4-BE49-F238E27FC236}">
-                <a16:creationId xmlns:a16="http://schemas.microsoft.com/office/drawing/2014/main" id="{6183BF52-4954-47E7-9CF8-D7E2C06DC15E}"/>
-              </a:ext>
-            </a:extLst>
-          </p:cNvPr>
-          <p:cNvSpPr>
-            <a:spLocks xmlns:a="http://schemas.openxmlformats.org/drawingml/2006/main" noGrp="1"/>
-          </p:cNvSpPr>
-          <p:nvPr/>
-        </p:nvSpPr>
-        <p:spPr>
-          <a:xfrm xmlns:a="http://schemas.openxmlformats.org/drawingml/2006/main">
-            <a:off x="1000125" y="4505325"/>
-            <a:ext cx="476250" cy="419100"/>
+                <a16:creationId xmlns:a16="http://schemas.microsoft.com/office/drawing/2014/main" id="{42EF3628-2DF8-494B-99EC-1F1AA83C05F5}"/>
+              </a:ext>
+            </a:extLst>
+          </p:cNvPr>
+          <p:cNvSpPr>
+            <a:spLocks xmlns:a="http://schemas.openxmlformats.org/drawingml/2006/main" noGrp="1"/>
+          </p:cNvSpPr>
+          <p:nvPr/>
+        </p:nvSpPr>
+        <p:spPr>
+          <a:xfrm xmlns:a="http://schemas.openxmlformats.org/drawingml/2006/main">
+            <a:off x="1162050" y="4829175"/>
+            <a:ext cx="400050" cy="400050"/>
           </a:xfrm>
           <a:prstGeom xmlns:a="http://schemas.openxmlformats.org/drawingml/2006/main" prst="rect">
             <a:avLst/>
@@ -8758,9 +8766,9 @@
           <a:lstStyle xmlns:a="http://schemas.openxmlformats.org/drawingml/2006/main"/>
           <a:p xmlns:a="http://schemas.openxmlformats.org/drawingml/2006/main">
             <a:pPr algn="ctr">
-              <a:defRPr sz="1350" b="1">
-                <a:solidFill>
-                  <a:srgbClr val="FFFFFF"/>
+              <a:defRPr sz="1125" b="1">
+                <a:solidFill>
+                  <a:srgbClr val="2F785D"/>
                 </a:solidFill>
                 <a:latin typeface="Arial"/>
                 <a:ea typeface="Arial"/>
@@ -8768,9 +8776,9 @@
               </a:defRPr>
             </a:pPr>
             <a:r>
-              <a:rPr sz="1350" b="1">
-                <a:solidFill>
-                  <a:srgbClr val="FFFFFF"/>
+              <a:rPr sz="1125" b="1">
+                <a:solidFill>
+                  <a:srgbClr val="2F785D"/>
                 </a:solidFill>
                 <a:latin typeface="Arial"/>
                 <a:ea typeface="Arial"/>
@@ -8786,19 +8794,19 @@
           <p:cNvPr id="22" name="">
             <a:extLst xmlns:a="http://schemas.openxmlformats.org/drawingml/2006/main">
               <a:ext uri="{FF2B5EF4-FFF2-40B4-BE49-F238E27FC236}">
-                <a16:creationId xmlns:a16="http://schemas.microsoft.com/office/drawing/2014/main" id="{ED025B83-C813-42CB-A106-0922774CB933}"/>
-              </a:ext>
-            </a:extLst>
-          </p:cNvPr>
-          <p:cNvSpPr>
-            <a:spLocks xmlns:a="http://schemas.openxmlformats.org/drawingml/2006/main" noGrp="1"/>
-          </p:cNvSpPr>
-          <p:nvPr/>
-        </p:nvSpPr>
-        <p:spPr>
-          <a:xfrm xmlns:a="http://schemas.openxmlformats.org/drawingml/2006/main">
-            <a:off x="1714500" y="4410075"/>
-            <a:ext cx="9429750" cy="609600"/>
+                <a16:creationId xmlns:a16="http://schemas.microsoft.com/office/drawing/2014/main" id="{5EC47B56-A573-4E82-A35C-272951742555}"/>
+              </a:ext>
+            </a:extLst>
+          </p:cNvPr>
+          <p:cNvSpPr>
+            <a:spLocks xmlns:a="http://schemas.openxmlformats.org/drawingml/2006/main" noGrp="1"/>
+          </p:cNvSpPr>
+          <p:nvPr/>
+        </p:nvSpPr>
+        <p:spPr>
+          <a:xfrm xmlns:a="http://schemas.openxmlformats.org/drawingml/2006/main">
+            <a:off x="1714500" y="4743450"/>
+            <a:ext cx="9525000" cy="809625"/>
           </a:xfrm>
           <a:prstGeom xmlns:a="http://schemas.openxmlformats.org/drawingml/2006/main" prst="rect">
             <a:avLst/>
@@ -8815,7 +8823,7 @@
           <a:lstStyle xmlns:a="http://schemas.openxmlformats.org/drawingml/2006/main"/>
           <a:p xmlns:a="http://schemas.openxmlformats.org/drawingml/2006/main">
             <a:pPr algn="l">
-              <a:defRPr sz="1500" b="1">
+              <a:defRPr sz="1725" b="1">
                 <a:solidFill>
                   <a:srgbClr val="2F785D"/>
                 </a:solidFill>
@@ -8825,7 +8833,7 @@
               </a:defRPr>
             </a:pPr>
             <a:r>
-              <a:rPr sz="1500" b="1">
+              <a:rPr sz="1725" b="1">
                 <a:solidFill>
                   <a:srgbClr val="2F785D"/>
                 </a:solidFill>
@@ -8833,7 +8841,7 @@
                 <a:ea typeface="Arial"/>
                 <a:cs typeface="Arial"/>
               </a:rPr>
-              <a:t>Check the result: Check by estimating or comparing with an equivalent expression.</a:t>
+              <a:t>60</a:t>
             </a:r>
           </a:p>
         </p:txBody>
@@ -8841,7 +8849,7 @@
     </p:spTree>
     <p:extLst>
       <p:ext uri="{BB962C8B-B14F-4D97-AF65-F5344CB8AC3E}">
-        <p14:creationId xmlns:p14="http://schemas.microsoft.com/office/powerpoint/2010/main" val="2017405637"/>
+        <p14:creationId xmlns:p14="http://schemas.microsoft.com/office/powerpoint/2010/main" val="133889820"/>
       </p:ext>
     </p:extLst>
   </p:cSld>
@@ -9134,7 +9142,7 @@
           <p:cNvPr id="15" name="">
             <a:extLst xmlns:a="http://schemas.openxmlformats.org/drawingml/2006/main">
               <a:ext uri="{FF2B5EF4-FFF2-40B4-BE49-F238E27FC236}">
-                <a16:creationId xmlns:a16="http://schemas.microsoft.com/office/drawing/2014/main" id="{B9196F80-C064-467D-B37D-98A7CDC33B81}"/>
+                <a16:creationId xmlns:a16="http://schemas.microsoft.com/office/drawing/2014/main" id="{6300CFC4-0EFE-43B9-A47B-5D5C34B62B3E}"/>
               </a:ext>
             </a:extLst>
           </p:cNvPr>
@@ -9166,7 +9174,7 @@
           <p:cNvPr id="2" name="">
             <a:extLst xmlns:a="http://schemas.openxmlformats.org/drawingml/2006/main">
               <a:ext uri="{FF2B5EF4-FFF2-40B4-BE49-F238E27FC236}">
-                <a16:creationId xmlns:a16="http://schemas.microsoft.com/office/drawing/2014/main" id="{7138F177-589C-4369-AE08-B3D68F8E407D}"/>
+                <a16:creationId xmlns:a16="http://schemas.microsoft.com/office/drawing/2014/main" id="{EFCAB261-6C2C-438A-9224-7613F5AF5E9A}"/>
               </a:ext>
             </a:extLst>
           </p:cNvPr>
@@ -9223,7 +9231,7 @@
           <p:cNvPr id="3" name="">
             <a:extLst xmlns:a="http://schemas.openxmlformats.org/drawingml/2006/main">
               <a:ext uri="{FF2B5EF4-FFF2-40B4-BE49-F238E27FC236}">
-                <a16:creationId xmlns:a16="http://schemas.microsoft.com/office/drawing/2014/main" id="{52162E4E-E5F1-4B5C-B1CE-6256E854B154}"/>
+                <a16:creationId xmlns:a16="http://schemas.microsoft.com/office/drawing/2014/main" id="{7A78F672-1C15-47B7-8153-E354689E9616}"/>
               </a:ext>
             </a:extLst>
           </p:cNvPr>
@@ -9255,7 +9263,7 @@
           <p:cNvPr id="4" name="">
             <a:extLst xmlns:a="http://schemas.openxmlformats.org/drawingml/2006/main">
               <a:ext uri="{FF2B5EF4-FFF2-40B4-BE49-F238E27FC236}">
-                <a16:creationId xmlns:a16="http://schemas.microsoft.com/office/drawing/2014/main" id="{B6D6BAAF-78AD-4DC5-A2B3-E23F3BCD5D3B}"/>
+                <a16:creationId xmlns:a16="http://schemas.microsoft.com/office/drawing/2014/main" id="{4BFF303F-0D68-4FAB-B0D4-0DB11DABC524}"/>
               </a:ext>
             </a:extLst>
           </p:cNvPr>
@@ -9312,7 +9320,7 @@
           <p:cNvPr id="5" name="">
             <a:extLst xmlns:a="http://schemas.openxmlformats.org/drawingml/2006/main">
               <a:ext uri="{FF2B5EF4-FFF2-40B4-BE49-F238E27FC236}">
-                <a16:creationId xmlns:a16="http://schemas.microsoft.com/office/drawing/2014/main" id="{A42A3FF8-8881-42C6-B311-FEAF5A48B927}"/>
+                <a16:creationId xmlns:a16="http://schemas.microsoft.com/office/drawing/2014/main" id="{F3CF722C-7F80-45CA-92CC-9CB40F413B47}"/>
               </a:ext>
             </a:extLst>
           </p:cNvPr>
@@ -9369,7 +9377,7 @@
           <p:cNvPr id="6" name="">
             <a:extLst xmlns:a="http://schemas.openxmlformats.org/drawingml/2006/main">
               <a:ext uri="{FF2B5EF4-FFF2-40B4-BE49-F238E27FC236}">
-                <a16:creationId xmlns:a16="http://schemas.microsoft.com/office/drawing/2014/main" id="{ACA9C46C-C3F3-492C-B3E3-1B5F95F727F3}"/>
+                <a16:creationId xmlns:a16="http://schemas.microsoft.com/office/drawing/2014/main" id="{C3D07817-93BE-4762-8777-FC977FD36FA4}"/>
               </a:ext>
             </a:extLst>
           </p:cNvPr>
@@ -9426,7 +9434,7 @@
           <p:cNvPr id="7" name="">
             <a:extLst xmlns:a="http://schemas.openxmlformats.org/drawingml/2006/main">
               <a:ext uri="{FF2B5EF4-FFF2-40B4-BE49-F238E27FC236}">
-                <a16:creationId xmlns:a16="http://schemas.microsoft.com/office/drawing/2014/main" id="{A70E23FA-21EF-4341-A32A-8AB9FA6E496D}"/>
+                <a16:creationId xmlns:a16="http://schemas.microsoft.com/office/drawing/2014/main" id="{C55E301D-FB25-475F-ACC3-E049FF0DED31}"/>
               </a:ext>
             </a:extLst>
           </p:cNvPr>
@@ -9458,7 +9466,7 @@
           <p:cNvPr id="8" name="">
             <a:extLst xmlns:a="http://schemas.openxmlformats.org/drawingml/2006/main">
               <a:ext uri="{FF2B5EF4-FFF2-40B4-BE49-F238E27FC236}">
-                <a16:creationId xmlns:a16="http://schemas.microsoft.com/office/drawing/2014/main" id="{078A7EFC-D443-4145-B103-684A47CED9D0}"/>
+                <a16:creationId xmlns:a16="http://schemas.microsoft.com/office/drawing/2014/main" id="{1706E1FB-DC23-40C5-8BE3-5DA903DA319E}"/>
               </a:ext>
             </a:extLst>
           </p:cNvPr>
@@ -9515,7 +9523,7 @@
           <p:cNvPr id="9" name="">
             <a:extLst xmlns:a="http://schemas.openxmlformats.org/drawingml/2006/main">
               <a:ext uri="{FF2B5EF4-FFF2-40B4-BE49-F238E27FC236}">
-                <a16:creationId xmlns:a16="http://schemas.microsoft.com/office/drawing/2014/main" id="{C0A13957-029B-451B-8ED0-D2BF7DC08DBC}"/>
+                <a16:creationId xmlns:a16="http://schemas.microsoft.com/office/drawing/2014/main" id="{608149FC-E342-407A-ADAB-39DEB267C2AA}"/>
               </a:ext>
             </a:extLst>
           </p:cNvPr>
@@ -9572,7 +9580,7 @@
           <p:cNvPr id="10" name="">
             <a:extLst xmlns:a="http://schemas.openxmlformats.org/drawingml/2006/main">
               <a:ext uri="{FF2B5EF4-FFF2-40B4-BE49-F238E27FC236}">
-                <a16:creationId xmlns:a16="http://schemas.microsoft.com/office/drawing/2014/main" id="{46C0D62B-2EAD-473E-B9D1-14D517E49655}"/>
+                <a16:creationId xmlns:a16="http://schemas.microsoft.com/office/drawing/2014/main" id="{17E96CBA-9D21-47EE-899A-B759703C9E1A}"/>
               </a:ext>
             </a:extLst>
           </p:cNvPr>
@@ -9629,7 +9637,7 @@
           <p:cNvPr id="11" name="">
             <a:extLst xmlns:a="http://schemas.openxmlformats.org/drawingml/2006/main">
               <a:ext uri="{FF2B5EF4-FFF2-40B4-BE49-F238E27FC236}">
-                <a16:creationId xmlns:a16="http://schemas.microsoft.com/office/drawing/2014/main" id="{4BC1D508-EB99-4263-A788-5544F2BCEEE0}"/>
+                <a16:creationId xmlns:a16="http://schemas.microsoft.com/office/drawing/2014/main" id="{22C466F0-82A4-420D-A6AE-7D2AD834BA1C}"/>
               </a:ext>
             </a:extLst>
           </p:cNvPr>
@@ -9686,7 +9694,7 @@
           <p:cNvPr id="12" name="">
             <a:extLst xmlns:a="http://schemas.openxmlformats.org/drawingml/2006/main">
               <a:ext uri="{FF2B5EF4-FFF2-40B4-BE49-F238E27FC236}">
-                <a16:creationId xmlns:a16="http://schemas.microsoft.com/office/drawing/2014/main" id="{A95830FD-2823-4BEA-8789-E29632A36C95}"/>
+                <a16:creationId xmlns:a16="http://schemas.microsoft.com/office/drawing/2014/main" id="{C8FC971E-5754-4B92-8BD1-41011BDF78D7}"/>
               </a:ext>
             </a:extLst>
           </p:cNvPr>
@@ -9718,7 +9726,7 @@
           <p:cNvPr id="13" name="">
             <a:extLst xmlns:a="http://schemas.openxmlformats.org/drawingml/2006/main">
               <a:ext uri="{FF2B5EF4-FFF2-40B4-BE49-F238E27FC236}">
-                <a16:creationId xmlns:a16="http://schemas.microsoft.com/office/drawing/2014/main" id="{25A1059C-899B-444E-8B8C-EC543485C3A9}"/>
+                <a16:creationId xmlns:a16="http://schemas.microsoft.com/office/drawing/2014/main" id="{5F3D0F54-8404-400F-8305-39025F4F9359}"/>
               </a:ext>
             </a:extLst>
           </p:cNvPr>
@@ -9775,7 +9783,7 @@
           <p:cNvPr id="14" name="">
             <a:extLst xmlns:a="http://schemas.openxmlformats.org/drawingml/2006/main">
               <a:ext uri="{FF2B5EF4-FFF2-40B4-BE49-F238E27FC236}">
-                <a16:creationId xmlns:a16="http://schemas.microsoft.com/office/drawing/2014/main" id="{E73A6376-7B88-41AA-A36B-33B437BA94AF}"/>
+                <a16:creationId xmlns:a16="http://schemas.microsoft.com/office/drawing/2014/main" id="{5DCB6E47-3C13-4365-A1D3-A4C25E736006}"/>
               </a:ext>
             </a:extLst>
           </p:cNvPr>
@@ -9830,7 +9838,7 @@
     </p:spTree>
     <p:extLst>
       <p:ext uri="{BB962C8B-B14F-4D97-AF65-F5344CB8AC3E}">
-        <p14:creationId xmlns:p14="http://schemas.microsoft.com/office/powerpoint/2010/main" val="38217579"/>
+        <p14:creationId xmlns:p14="http://schemas.microsoft.com/office/powerpoint/2010/main" val="1200854871"/>
       </p:ext>
     </p:extLst>
   </p:cSld>
@@ -10031,7 +10039,7 @@
           <p:cNvPr id="16" name="">
             <a:extLst xmlns:a="http://schemas.openxmlformats.org/drawingml/2006/main">
               <a:ext uri="{FF2B5EF4-FFF2-40B4-BE49-F238E27FC236}">
-                <a16:creationId xmlns:a16="http://schemas.microsoft.com/office/drawing/2014/main" id="{7B84CF3F-969A-4BD4-8F85-F775B23832CB}"/>
+                <a16:creationId xmlns:a16="http://schemas.microsoft.com/office/drawing/2014/main" id="{FA8A1AE8-25A5-4092-B84B-384D690C8D00}"/>
               </a:ext>
             </a:extLst>
           </p:cNvPr>
@@ -10063,7 +10071,7 @@
           <p:cNvPr id="2" name="">
             <a:extLst xmlns:a="http://schemas.openxmlformats.org/drawingml/2006/main">
               <a:ext uri="{FF2B5EF4-FFF2-40B4-BE49-F238E27FC236}">
-                <a16:creationId xmlns:a16="http://schemas.microsoft.com/office/drawing/2014/main" id="{5DC37B42-FBD1-4CE6-B99D-ADFF1E8AEB75}"/>
+                <a16:creationId xmlns:a16="http://schemas.microsoft.com/office/drawing/2014/main" id="{1BD8DC1F-04D9-423C-9DE5-BC546E755A6D}"/>
               </a:ext>
             </a:extLst>
           </p:cNvPr>
@@ -10120,7 +10128,7 @@
           <p:cNvPr id="3" name="">
             <a:extLst xmlns:a="http://schemas.openxmlformats.org/drawingml/2006/main">
               <a:ext uri="{FF2B5EF4-FFF2-40B4-BE49-F238E27FC236}">
-                <a16:creationId xmlns:a16="http://schemas.microsoft.com/office/drawing/2014/main" id="{20A0ED67-CE58-454E-9622-5548511C2DCF}"/>
+                <a16:creationId xmlns:a16="http://schemas.microsoft.com/office/drawing/2014/main" id="{ACEEECFC-4E19-47AB-A0F8-1B2F2D2CE153}"/>
               </a:ext>
             </a:extLst>
           </p:cNvPr>
@@ -10152,7 +10160,7 @@
           <p:cNvPr id="4" name="">
             <a:extLst xmlns:a="http://schemas.openxmlformats.org/drawingml/2006/main">
               <a:ext uri="{FF2B5EF4-FFF2-40B4-BE49-F238E27FC236}">
-                <a16:creationId xmlns:a16="http://schemas.microsoft.com/office/drawing/2014/main" id="{D6F8AB75-F9D2-4D13-8AB4-E4F2BA04068A}"/>
+                <a16:creationId xmlns:a16="http://schemas.microsoft.com/office/drawing/2014/main" id="{DDECC7C8-6317-4D9F-92A8-60F46AFDE080}"/>
               </a:ext>
             </a:extLst>
           </p:cNvPr>
@@ -10209,7 +10217,7 @@
           <p:cNvPr id="5" name="">
             <a:extLst xmlns:a="http://schemas.openxmlformats.org/drawingml/2006/main">
               <a:ext uri="{FF2B5EF4-FFF2-40B4-BE49-F238E27FC236}">
-                <a16:creationId xmlns:a16="http://schemas.microsoft.com/office/drawing/2014/main" id="{CAB76CEE-1FB0-41B5-8F61-311EB62D143F}"/>
+                <a16:creationId xmlns:a16="http://schemas.microsoft.com/office/drawing/2014/main" id="{4AF3A3D3-713F-4A56-83C8-069DD2CD3649}"/>
               </a:ext>
             </a:extLst>
           </p:cNvPr>
@@ -10266,7 +10274,7 @@
           <p:cNvPr id="6" name="">
             <a:extLst xmlns:a="http://schemas.openxmlformats.org/drawingml/2006/main">
               <a:ext uri="{FF2B5EF4-FFF2-40B4-BE49-F238E27FC236}">
-                <a16:creationId xmlns:a16="http://schemas.microsoft.com/office/drawing/2014/main" id="{3BA3F936-AE5A-42D0-9FB2-F1FED11FA736}"/>
+                <a16:creationId xmlns:a16="http://schemas.microsoft.com/office/drawing/2014/main" id="{77FDB052-1279-48D3-857E-8B158188D9AE}"/>
               </a:ext>
             </a:extLst>
           </p:cNvPr>
@@ -10323,7 +10331,7 @@
           <p:cNvPr id="7" name="">
             <a:extLst xmlns:a="http://schemas.openxmlformats.org/drawingml/2006/main">
               <a:ext uri="{FF2B5EF4-FFF2-40B4-BE49-F238E27FC236}">
-                <a16:creationId xmlns:a16="http://schemas.microsoft.com/office/drawing/2014/main" id="{8F314961-F7C7-40D1-8DAB-A8BC00FC6CD3}"/>
+                <a16:creationId xmlns:a16="http://schemas.microsoft.com/office/drawing/2014/main" id="{152C9E93-63B3-4750-8B20-B2533A0CE15E}"/>
               </a:ext>
             </a:extLst>
           </p:cNvPr>
@@ -10355,7 +10363,7 @@
           <p:cNvPr id="8" name="">
             <a:extLst xmlns:a="http://schemas.openxmlformats.org/drawingml/2006/main">
               <a:ext uri="{FF2B5EF4-FFF2-40B4-BE49-F238E27FC236}">
-                <a16:creationId xmlns:a16="http://schemas.microsoft.com/office/drawing/2014/main" id="{CE2F8131-4687-4DBD-B1FA-35A65913572F}"/>
+                <a16:creationId xmlns:a16="http://schemas.microsoft.com/office/drawing/2014/main" id="{3CDCAB97-DD3F-4969-8E94-44831B3A15AA}"/>
               </a:ext>
             </a:extLst>
           </p:cNvPr>
@@ -10412,7 +10420,7 @@
           <p:cNvPr id="9" name="">
             <a:extLst xmlns:a="http://schemas.openxmlformats.org/drawingml/2006/main">
               <a:ext uri="{FF2B5EF4-FFF2-40B4-BE49-F238E27FC236}">
-                <a16:creationId xmlns:a16="http://schemas.microsoft.com/office/drawing/2014/main" id="{E3526F27-B41B-4426-9CB8-B633AC2C643A}"/>
+                <a16:creationId xmlns:a16="http://schemas.microsoft.com/office/drawing/2014/main" id="{5FC67999-77CC-446C-8B23-BAB2E61A4671}"/>
               </a:ext>
             </a:extLst>
           </p:cNvPr>
@@ -10469,7 +10477,7 @@
           <p:cNvPr id="10" name="">
             <a:extLst xmlns:a="http://schemas.openxmlformats.org/drawingml/2006/main">
               <a:ext uri="{FF2B5EF4-FFF2-40B4-BE49-F238E27FC236}">
-                <a16:creationId xmlns:a16="http://schemas.microsoft.com/office/drawing/2014/main" id="{6FA34D82-AB98-4CE5-9CCB-B890192F57CB}"/>
+                <a16:creationId xmlns:a16="http://schemas.microsoft.com/office/drawing/2014/main" id="{0CB1A944-7E05-4BDA-8F76-C29BA845B77D}"/>
               </a:ext>
             </a:extLst>
           </p:cNvPr>
@@ -10526,7 +10534,7 @@
           <p:cNvPr id="11" name="">
             <a:extLst xmlns:a="http://schemas.openxmlformats.org/drawingml/2006/main">
               <a:ext uri="{FF2B5EF4-FFF2-40B4-BE49-F238E27FC236}">
-                <a16:creationId xmlns:a16="http://schemas.microsoft.com/office/drawing/2014/main" id="{D500F2A7-5915-4786-A244-FD3261E1A8A3}"/>
+                <a16:creationId xmlns:a16="http://schemas.microsoft.com/office/drawing/2014/main" id="{20B79707-3754-4C2C-8F11-9C793A8CDA31}"/>
               </a:ext>
             </a:extLst>
           </p:cNvPr>
@@ -10583,7 +10591,7 @@
           <p:cNvPr id="12" name="">
             <a:extLst xmlns:a="http://schemas.openxmlformats.org/drawingml/2006/main">
               <a:ext uri="{FF2B5EF4-FFF2-40B4-BE49-F238E27FC236}">
-                <a16:creationId xmlns:a16="http://schemas.microsoft.com/office/drawing/2014/main" id="{22E686F2-A930-4BEC-B87A-C4AFD1AFF620}"/>
+                <a16:creationId xmlns:a16="http://schemas.microsoft.com/office/drawing/2014/main" id="{93971B3C-A7ED-4AB0-9F8E-B8EEF314AD30}"/>
               </a:ext>
             </a:extLst>
           </p:cNvPr>
@@ -10640,7 +10648,7 @@
           <p:cNvPr id="13" name="">
             <a:extLst xmlns:a="http://schemas.openxmlformats.org/drawingml/2006/main">
               <a:ext uri="{FF2B5EF4-FFF2-40B4-BE49-F238E27FC236}">
-                <a16:creationId xmlns:a16="http://schemas.microsoft.com/office/drawing/2014/main" id="{AA4F12CA-9651-4814-B44E-4D6C00BFDC76}"/>
+                <a16:creationId xmlns:a16="http://schemas.microsoft.com/office/drawing/2014/main" id="{24C56839-01EA-4424-9BC3-6BF106875CD6}"/>
               </a:ext>
             </a:extLst>
           </p:cNvPr>
@@ -10697,7 +10705,7 @@
           <p:cNvPr id="14" name="">
             <a:extLst xmlns:a="http://schemas.openxmlformats.org/drawingml/2006/main">
               <a:ext uri="{FF2B5EF4-FFF2-40B4-BE49-F238E27FC236}">
-                <a16:creationId xmlns:a16="http://schemas.microsoft.com/office/drawing/2014/main" id="{38B69CEE-AEC7-4EA3-BAB3-01E87E89BE14}"/>
+                <a16:creationId xmlns:a16="http://schemas.microsoft.com/office/drawing/2014/main" id="{117251A7-D06E-42FC-88FC-5222760A88F3}"/>
               </a:ext>
             </a:extLst>
           </p:cNvPr>
@@ -10754,7 +10762,7 @@
           <p:cNvPr id="15" name="">
             <a:extLst xmlns:a="http://schemas.openxmlformats.org/drawingml/2006/main">
               <a:ext uri="{FF2B5EF4-FFF2-40B4-BE49-F238E27FC236}">
-                <a16:creationId xmlns:a16="http://schemas.microsoft.com/office/drawing/2014/main" id="{450EBEA4-1B8B-43FA-A7DD-539AC47F4813}"/>
+                <a16:creationId xmlns:a16="http://schemas.microsoft.com/office/drawing/2014/main" id="{8857522E-EECF-4C6B-9B0D-743E1A2A494D}"/>
               </a:ext>
             </a:extLst>
           </p:cNvPr>
@@ -10809,7 +10817,7 @@
     </p:spTree>
     <p:extLst>
       <p:ext uri="{BB962C8B-B14F-4D97-AF65-F5344CB8AC3E}">
-        <p14:creationId xmlns:p14="http://schemas.microsoft.com/office/powerpoint/2010/main" val="1743751738"/>
+        <p14:creationId xmlns:p14="http://schemas.microsoft.com/office/powerpoint/2010/main" val="527519677"/>
       </p:ext>
     </p:extLst>
   </p:cSld>
@@ -10964,7 +10972,7 @@
           <p:cNvPr id="16" name="">
             <a:extLst xmlns:a="http://schemas.openxmlformats.org/drawingml/2006/main">
               <a:ext uri="{FF2B5EF4-FFF2-40B4-BE49-F238E27FC236}">
-                <a16:creationId xmlns:a16="http://schemas.microsoft.com/office/drawing/2014/main" id="{D0AA3BD1-E27C-4036-AC8F-D19BDCCB2624}"/>
+                <a16:creationId xmlns:a16="http://schemas.microsoft.com/office/drawing/2014/main" id="{800F819F-8B6E-494E-9C00-4A8D483EB663}"/>
               </a:ext>
             </a:extLst>
           </p:cNvPr>
@@ -10996,7 +11004,7 @@
           <p:cNvPr id="2" name="">
             <a:extLst xmlns:a="http://schemas.openxmlformats.org/drawingml/2006/main">
               <a:ext uri="{FF2B5EF4-FFF2-40B4-BE49-F238E27FC236}">
-                <a16:creationId xmlns:a16="http://schemas.microsoft.com/office/drawing/2014/main" id="{FB937D41-0C44-47DF-B251-CD24B18E4EB4}"/>
+                <a16:creationId xmlns:a16="http://schemas.microsoft.com/office/drawing/2014/main" id="{AE155160-5791-4957-A1D2-9D9B751CEDAE}"/>
               </a:ext>
             </a:extLst>
           </p:cNvPr>
@@ -11053,7 +11061,7 @@
           <p:cNvPr id="3" name="">
             <a:extLst xmlns:a="http://schemas.openxmlformats.org/drawingml/2006/main">
               <a:ext uri="{FF2B5EF4-FFF2-40B4-BE49-F238E27FC236}">
-                <a16:creationId xmlns:a16="http://schemas.microsoft.com/office/drawing/2014/main" id="{E646A449-FDB1-4616-93C2-776C74DF828E}"/>
+                <a16:creationId xmlns:a16="http://schemas.microsoft.com/office/drawing/2014/main" id="{017B3245-BE76-4A8B-BB42-1704C5EC6D5C}"/>
               </a:ext>
             </a:extLst>
           </p:cNvPr>
@@ -11085,7 +11093,7 @@
           <p:cNvPr id="4" name="">
             <a:extLst xmlns:a="http://schemas.openxmlformats.org/drawingml/2006/main">
               <a:ext uri="{FF2B5EF4-FFF2-40B4-BE49-F238E27FC236}">
-                <a16:creationId xmlns:a16="http://schemas.microsoft.com/office/drawing/2014/main" id="{B991C041-1FA4-4A4C-9744-17EC0F0DCBFA}"/>
+                <a16:creationId xmlns:a16="http://schemas.microsoft.com/office/drawing/2014/main" id="{8E6835B6-049B-4EE0-858A-69D3AD2B71E2}"/>
               </a:ext>
             </a:extLst>
           </p:cNvPr>
@@ -11142,7 +11150,7 @@
           <p:cNvPr id="5" name="">
             <a:extLst xmlns:a="http://schemas.openxmlformats.org/drawingml/2006/main">
               <a:ext uri="{FF2B5EF4-FFF2-40B4-BE49-F238E27FC236}">
-                <a16:creationId xmlns:a16="http://schemas.microsoft.com/office/drawing/2014/main" id="{64919A34-266F-4AEC-91D5-217636203FA5}"/>
+                <a16:creationId xmlns:a16="http://schemas.microsoft.com/office/drawing/2014/main" id="{ACC7A337-CCDB-4B7D-914C-4A9B43630CC5}"/>
               </a:ext>
             </a:extLst>
           </p:cNvPr>
@@ -11199,7 +11207,7 @@
           <p:cNvPr id="6" name="">
             <a:extLst xmlns:a="http://schemas.openxmlformats.org/drawingml/2006/main">
               <a:ext uri="{FF2B5EF4-FFF2-40B4-BE49-F238E27FC236}">
-                <a16:creationId xmlns:a16="http://schemas.microsoft.com/office/drawing/2014/main" id="{FB9A7333-E3A7-4843-B56E-71F4878F98F4}"/>
+                <a16:creationId xmlns:a16="http://schemas.microsoft.com/office/drawing/2014/main" id="{61CCFE43-C0EE-427D-9E6B-944C182F972A}"/>
               </a:ext>
             </a:extLst>
           </p:cNvPr>
@@ -11256,7 +11264,7 @@
           <p:cNvPr id="7" name="">
             <a:extLst xmlns:a="http://schemas.openxmlformats.org/drawingml/2006/main">
               <a:ext uri="{FF2B5EF4-FFF2-40B4-BE49-F238E27FC236}">
-                <a16:creationId xmlns:a16="http://schemas.microsoft.com/office/drawing/2014/main" id="{77B2B2BF-A1DE-4269-B3C3-F2AA679D7459}"/>
+                <a16:creationId xmlns:a16="http://schemas.microsoft.com/office/drawing/2014/main" id="{3E5F17C0-FF2A-47A5-8AD9-CAE7D6A6C50E}"/>
               </a:ext>
             </a:extLst>
           </p:cNvPr>
@@ -11288,7 +11296,7 @@
           <p:cNvPr id="8" name="">
             <a:extLst xmlns:a="http://schemas.openxmlformats.org/drawingml/2006/main">
               <a:ext uri="{FF2B5EF4-FFF2-40B4-BE49-F238E27FC236}">
-                <a16:creationId xmlns:a16="http://schemas.microsoft.com/office/drawing/2014/main" id="{EB017C8E-749D-409C-811A-29DEE5E79BD9}"/>
+                <a16:creationId xmlns:a16="http://schemas.microsoft.com/office/drawing/2014/main" id="{17AB6953-3ADF-47F3-9747-DF659153F46C}"/>
               </a:ext>
             </a:extLst>
           </p:cNvPr>
@@ -11345,7 +11353,7 @@
           <p:cNvPr id="9" name="">
             <a:extLst xmlns:a="http://schemas.openxmlformats.org/drawingml/2006/main">
               <a:ext uri="{FF2B5EF4-FFF2-40B4-BE49-F238E27FC236}">
-                <a16:creationId xmlns:a16="http://schemas.microsoft.com/office/drawing/2014/main" id="{80881663-DC86-4B68-9F83-935914084E2F}"/>
+                <a16:creationId xmlns:a16="http://schemas.microsoft.com/office/drawing/2014/main" id="{C330C629-5099-4801-B5F2-6D0023E92B45}"/>
               </a:ext>
             </a:extLst>
           </p:cNvPr>
@@ -11406,7 +11414,7 @@
           <p:nvPr/>
         </p:nvPicPr>
         <p:blipFill>
-          <a:blip xmlns:r="http://schemas.openxmlformats.org/officeDocument/2006/relationships" xmlns:a="http://schemas.openxmlformats.org/drawingml/2006/main" r:embed="R47d64498370043eb"/>
+          <a:blip xmlns:r="http://schemas.openxmlformats.org/officeDocument/2006/relationships" xmlns:a="http://schemas.openxmlformats.org/drawingml/2006/main" r:embed="R69c1a49e34d1471e"/>
           <a:stretch xmlns:a="http://schemas.openxmlformats.org/drawingml/2006/main"/>
         </p:blipFill>
         <p:spPr>
@@ -11424,7 +11432,7 @@
           <p:cNvPr id="11" name="">
             <a:extLst xmlns:a="http://schemas.openxmlformats.org/drawingml/2006/main">
               <a:ext uri="{FF2B5EF4-FFF2-40B4-BE49-F238E27FC236}">
-                <a16:creationId xmlns:a16="http://schemas.microsoft.com/office/drawing/2014/main" id="{B0A4C726-9F0B-49AC-B95D-2C696D1C1234}"/>
+                <a16:creationId xmlns:a16="http://schemas.microsoft.com/office/drawing/2014/main" id="{A2520B54-2F38-4EAD-A75E-517D86B0C1A7}"/>
               </a:ext>
             </a:extLst>
           </p:cNvPr>
@@ -11481,7 +11489,7 @@
           <p:cNvPr id="12" name="">
             <a:extLst xmlns:a="http://schemas.openxmlformats.org/drawingml/2006/main">
               <a:ext uri="{FF2B5EF4-FFF2-40B4-BE49-F238E27FC236}">
-                <a16:creationId xmlns:a16="http://schemas.microsoft.com/office/drawing/2014/main" id="{FD740BC0-3B24-4301-AE0B-8AF77D4D2EDB}"/>
+                <a16:creationId xmlns:a16="http://schemas.microsoft.com/office/drawing/2014/main" id="{B542109B-2899-4EFF-BE23-8D2F54A8E89F}"/>
               </a:ext>
             </a:extLst>
           </p:cNvPr>
@@ -11538,7 +11546,7 @@
           <p:cNvPr id="13" name="">
             <a:extLst xmlns:a="http://schemas.openxmlformats.org/drawingml/2006/main">
               <a:ext uri="{FF2B5EF4-FFF2-40B4-BE49-F238E27FC236}">
-                <a16:creationId xmlns:a16="http://schemas.microsoft.com/office/drawing/2014/main" id="{2A4C6E3B-5944-488D-BE02-9A806E61B7C0}"/>
+                <a16:creationId xmlns:a16="http://schemas.microsoft.com/office/drawing/2014/main" id="{ED140323-B731-401F-8082-FD74074D125C}"/>
               </a:ext>
             </a:extLst>
           </p:cNvPr>
@@ -11570,7 +11578,7 @@
           <p:cNvPr id="14" name="">
             <a:extLst xmlns:a="http://schemas.openxmlformats.org/drawingml/2006/main">
               <a:ext uri="{FF2B5EF4-FFF2-40B4-BE49-F238E27FC236}">
-                <a16:creationId xmlns:a16="http://schemas.microsoft.com/office/drawing/2014/main" id="{CC2AF713-08D1-449B-9056-059BAD0B26C8}"/>
+                <a16:creationId xmlns:a16="http://schemas.microsoft.com/office/drawing/2014/main" id="{894A527B-A659-4EF3-BDC2-00453A30A8DC}"/>
               </a:ext>
             </a:extLst>
           </p:cNvPr>
@@ -11627,7 +11635,7 @@
           <p:cNvPr id="15" name="">
             <a:extLst xmlns:a="http://schemas.openxmlformats.org/drawingml/2006/main">
               <a:ext uri="{FF2B5EF4-FFF2-40B4-BE49-F238E27FC236}">
-                <a16:creationId xmlns:a16="http://schemas.microsoft.com/office/drawing/2014/main" id="{FC04E0D4-68C8-4158-A746-68B7A29E7E7C}"/>
+                <a16:creationId xmlns:a16="http://schemas.microsoft.com/office/drawing/2014/main" id="{B3F82974-77B8-4302-A950-FA246B5FEF2B}"/>
               </a:ext>
             </a:extLst>
           </p:cNvPr>
@@ -11682,7 +11690,7 @@
     </p:spTree>
     <p:extLst>
       <p:ext uri="{BB962C8B-B14F-4D97-AF65-F5344CB8AC3E}">
-        <p14:creationId xmlns:p14="http://schemas.microsoft.com/office/powerpoint/2010/main" val="515352054"/>
+        <p14:creationId xmlns:p14="http://schemas.microsoft.com/office/powerpoint/2010/main" val="1483512320"/>
       </p:ext>
     </p:extLst>
   </p:cSld>
@@ -11837,7 +11845,7 @@
           <p:cNvPr id="23" name="">
             <a:extLst xmlns:a="http://schemas.openxmlformats.org/drawingml/2006/main">
               <a:ext uri="{FF2B5EF4-FFF2-40B4-BE49-F238E27FC236}">
-                <a16:creationId xmlns:a16="http://schemas.microsoft.com/office/drawing/2014/main" id="{4B03451B-569D-487B-B7EF-225AF799179F}"/>
+                <a16:creationId xmlns:a16="http://schemas.microsoft.com/office/drawing/2014/main" id="{CB4E5105-9192-4EAB-9C73-F86F73C2223E}"/>
               </a:ext>
             </a:extLst>
           </p:cNvPr>
@@ -11869,7 +11877,7 @@
           <p:cNvPr id="2" name="">
             <a:extLst xmlns:a="http://schemas.openxmlformats.org/drawingml/2006/main">
               <a:ext uri="{FF2B5EF4-FFF2-40B4-BE49-F238E27FC236}">
-                <a16:creationId xmlns:a16="http://schemas.microsoft.com/office/drawing/2014/main" id="{D9AD8344-E23D-4A66-82C8-5B145DC2E18A}"/>
+                <a16:creationId xmlns:a16="http://schemas.microsoft.com/office/drawing/2014/main" id="{7480FED2-DE16-4C0B-B622-D81FCF5B9986}"/>
               </a:ext>
             </a:extLst>
           </p:cNvPr>
@@ -11926,7 +11934,7 @@
           <p:cNvPr id="3" name="">
             <a:extLst xmlns:a="http://schemas.openxmlformats.org/drawingml/2006/main">
               <a:ext uri="{FF2B5EF4-FFF2-40B4-BE49-F238E27FC236}">
-                <a16:creationId xmlns:a16="http://schemas.microsoft.com/office/drawing/2014/main" id="{1E8B5C76-E5C2-4A7C-8CDA-FDCC879464C9}"/>
+                <a16:creationId xmlns:a16="http://schemas.microsoft.com/office/drawing/2014/main" id="{F32642DC-6348-40D7-B374-C79765FBC4F5}"/>
               </a:ext>
             </a:extLst>
           </p:cNvPr>
@@ -11958,7 +11966,7 @@
           <p:cNvPr id="4" name="">
             <a:extLst xmlns:a="http://schemas.openxmlformats.org/drawingml/2006/main">
               <a:ext uri="{FF2B5EF4-FFF2-40B4-BE49-F238E27FC236}">
-                <a16:creationId xmlns:a16="http://schemas.microsoft.com/office/drawing/2014/main" id="{6CC3033E-B5DD-4C65-A8C1-D19618231C8F}"/>
+                <a16:creationId xmlns:a16="http://schemas.microsoft.com/office/drawing/2014/main" id="{C333C245-BE09-4118-B4F4-1666A45A161C}"/>
               </a:ext>
             </a:extLst>
           </p:cNvPr>
@@ -12015,7 +12023,7 @@
           <p:cNvPr id="5" name="">
             <a:extLst xmlns:a="http://schemas.openxmlformats.org/drawingml/2006/main">
               <a:ext uri="{FF2B5EF4-FFF2-40B4-BE49-F238E27FC236}">
-                <a16:creationId xmlns:a16="http://schemas.microsoft.com/office/drawing/2014/main" id="{A2095697-4671-444C-90A0-B8068F5B8E60}"/>
+                <a16:creationId xmlns:a16="http://schemas.microsoft.com/office/drawing/2014/main" id="{370C4CB4-A6B2-41F9-9B19-D1F40D4395F9}"/>
               </a:ext>
             </a:extLst>
           </p:cNvPr>
@@ -12072,7 +12080,7 @@
           <p:cNvPr id="6" name="">
             <a:extLst xmlns:a="http://schemas.openxmlformats.org/drawingml/2006/main">
               <a:ext uri="{FF2B5EF4-FFF2-40B4-BE49-F238E27FC236}">
-                <a16:creationId xmlns:a16="http://schemas.microsoft.com/office/drawing/2014/main" id="{C61B19D1-B9F7-4A90-8A86-E5396FAA5F2E}"/>
+                <a16:creationId xmlns:a16="http://schemas.microsoft.com/office/drawing/2014/main" id="{36358F6D-0BC0-4A49-8AED-4C3F5136D544}"/>
               </a:ext>
             </a:extLst>
           </p:cNvPr>
@@ -12129,7 +12137,7 @@
           <p:cNvPr id="7" name="">
             <a:extLst xmlns:a="http://schemas.openxmlformats.org/drawingml/2006/main">
               <a:ext uri="{FF2B5EF4-FFF2-40B4-BE49-F238E27FC236}">
-                <a16:creationId xmlns:a16="http://schemas.microsoft.com/office/drawing/2014/main" id="{2CADB19A-4A37-4F03-9C47-C1CF92B48BCC}"/>
+                <a16:creationId xmlns:a16="http://schemas.microsoft.com/office/drawing/2014/main" id="{A26EECED-0093-45C3-AA6B-8E99C8938B6E}"/>
               </a:ext>
             </a:extLst>
           </p:cNvPr>
@@ -12161,7 +12169,7 @@
           <p:cNvPr id="8" name="">
             <a:extLst xmlns:a="http://schemas.openxmlformats.org/drawingml/2006/main">
               <a:ext uri="{FF2B5EF4-FFF2-40B4-BE49-F238E27FC236}">
-                <a16:creationId xmlns:a16="http://schemas.microsoft.com/office/drawing/2014/main" id="{8B422668-40DA-4925-B0F0-A2BCE9C13812}"/>
+                <a16:creationId xmlns:a16="http://schemas.microsoft.com/office/drawing/2014/main" id="{EAC24AA7-5A7C-4285-8B64-8203751F6556}"/>
               </a:ext>
             </a:extLst>
           </p:cNvPr>
@@ -12218,7 +12226,7 @@
           <p:cNvPr id="9" name="">
             <a:extLst xmlns:a="http://schemas.openxmlformats.org/drawingml/2006/main">
               <a:ext uri="{FF2B5EF4-FFF2-40B4-BE49-F238E27FC236}">
-                <a16:creationId xmlns:a16="http://schemas.microsoft.com/office/drawing/2014/main" id="{FD809EBB-6E75-4D94-83B8-21E805537E3B}"/>
+                <a16:creationId xmlns:a16="http://schemas.microsoft.com/office/drawing/2014/main" id="{0857DA26-3A5A-4560-AC64-D4AF3AD47E15}"/>
               </a:ext>
             </a:extLst>
           </p:cNvPr>
@@ -12275,7 +12283,7 @@
           <p:cNvPr id="10" name="">
             <a:extLst xmlns:a="http://schemas.openxmlformats.org/drawingml/2006/main">
               <a:ext uri="{FF2B5EF4-FFF2-40B4-BE49-F238E27FC236}">
-                <a16:creationId xmlns:a16="http://schemas.microsoft.com/office/drawing/2014/main" id="{B17B638B-F449-4330-BF2B-1470D0F7BC1E}"/>
+                <a16:creationId xmlns:a16="http://schemas.microsoft.com/office/drawing/2014/main" id="{DFEB8995-D888-4CB6-A6A2-DDEA1569AFC8}"/>
               </a:ext>
             </a:extLst>
           </p:cNvPr>
@@ -12309,7 +12317,7 @@
           <p:cNvPr id="11" name="">
             <a:extLst xmlns:a="http://schemas.openxmlformats.org/drawingml/2006/main">
               <a:ext uri="{FF2B5EF4-FFF2-40B4-BE49-F238E27FC236}">
-                <a16:creationId xmlns:a16="http://schemas.microsoft.com/office/drawing/2014/main" id="{53C65AD5-63F3-4236-A54C-CCD07EC74CB5}"/>
+                <a16:creationId xmlns:a16="http://schemas.microsoft.com/office/drawing/2014/main" id="{C8CFC664-B298-4627-A9B5-9D41AE037858}"/>
               </a:ext>
             </a:extLst>
           </p:cNvPr>
@@ -12341,7 +12349,7 @@
           <p:cNvPr id="12" name="">
             <a:extLst xmlns:a="http://schemas.openxmlformats.org/drawingml/2006/main">
               <a:ext uri="{FF2B5EF4-FFF2-40B4-BE49-F238E27FC236}">
-                <a16:creationId xmlns:a16="http://schemas.microsoft.com/office/drawing/2014/main" id="{33F256F7-A9FC-4E97-825A-C7130772C702}"/>
+                <a16:creationId xmlns:a16="http://schemas.microsoft.com/office/drawing/2014/main" id="{E9552933-7396-4169-9D59-DD4732DCB9F3}"/>
               </a:ext>
             </a:extLst>
           </p:cNvPr>
@@ -12398,7 +12406,7 @@
           <p:cNvPr id="13" name="">
             <a:extLst xmlns:a="http://schemas.openxmlformats.org/drawingml/2006/main">
               <a:ext uri="{FF2B5EF4-FFF2-40B4-BE49-F238E27FC236}">
-                <a16:creationId xmlns:a16="http://schemas.microsoft.com/office/drawing/2014/main" id="{C5DA5830-3EC0-4D29-98BF-E09604867E46}"/>
+                <a16:creationId xmlns:a16="http://schemas.microsoft.com/office/drawing/2014/main" id="{CFF44E44-150D-457C-A850-12F335ECE99E}"/>
               </a:ext>
             </a:extLst>
           </p:cNvPr>
@@ -12455,7 +12463,7 @@
           <p:cNvPr id="14" name="">
             <a:extLst xmlns:a="http://schemas.openxmlformats.org/drawingml/2006/main">
               <a:ext uri="{FF2B5EF4-FFF2-40B4-BE49-F238E27FC236}">
-                <a16:creationId xmlns:a16="http://schemas.microsoft.com/office/drawing/2014/main" id="{F4C19F8E-17DD-40F8-8FBB-1072E329C74A}"/>
+                <a16:creationId xmlns:a16="http://schemas.microsoft.com/office/drawing/2014/main" id="{584AB81B-10B9-4960-8778-5E6EED1A6C56}"/>
               </a:ext>
             </a:extLst>
           </p:cNvPr>
@@ -12489,7 +12497,7 @@
           <p:cNvPr id="15" name="">
             <a:extLst xmlns:a="http://schemas.openxmlformats.org/drawingml/2006/main">
               <a:ext uri="{FF2B5EF4-FFF2-40B4-BE49-F238E27FC236}">
-                <a16:creationId xmlns:a16="http://schemas.microsoft.com/office/drawing/2014/main" id="{40BBA26B-E3F2-4815-AB61-D9D2166C6913}"/>
+                <a16:creationId xmlns:a16="http://schemas.microsoft.com/office/drawing/2014/main" id="{E56433B3-F5B1-473B-8990-C1508946A307}"/>
               </a:ext>
             </a:extLst>
           </p:cNvPr>
@@ -12521,7 +12529,7 @@
           <p:cNvPr id="16" name="">
             <a:extLst xmlns:a="http://schemas.openxmlformats.org/drawingml/2006/main">
               <a:ext uri="{FF2B5EF4-FFF2-40B4-BE49-F238E27FC236}">
-                <a16:creationId xmlns:a16="http://schemas.microsoft.com/office/drawing/2014/main" id="{94B446A8-EC76-4A22-859F-135314A59B09}"/>
+                <a16:creationId xmlns:a16="http://schemas.microsoft.com/office/drawing/2014/main" id="{F15F3742-893D-41EC-A66E-E7E873ED1694}"/>
               </a:ext>
             </a:extLst>
           </p:cNvPr>
@@ -12578,7 +12586,7 @@
           <p:cNvPr id="17" name="">
             <a:extLst xmlns:a="http://schemas.openxmlformats.org/drawingml/2006/main">
               <a:ext uri="{FF2B5EF4-FFF2-40B4-BE49-F238E27FC236}">
-                <a16:creationId xmlns:a16="http://schemas.microsoft.com/office/drawing/2014/main" id="{7AF8D1D2-C140-46C0-843A-7605F3C33797}"/>
+                <a16:creationId xmlns:a16="http://schemas.microsoft.com/office/drawing/2014/main" id="{B70D8244-51E1-4E86-9F57-535A8BEA08B7}"/>
               </a:ext>
             </a:extLst>
           </p:cNvPr>
@@ -12635,7 +12643,7 @@
           <p:cNvPr id="18" name="">
             <a:extLst xmlns:a="http://schemas.openxmlformats.org/drawingml/2006/main">
               <a:ext uri="{FF2B5EF4-FFF2-40B4-BE49-F238E27FC236}">
-                <a16:creationId xmlns:a16="http://schemas.microsoft.com/office/drawing/2014/main" id="{8D887B1A-CB3C-4151-85DA-285F8CEE102A}"/>
+                <a16:creationId xmlns:a16="http://schemas.microsoft.com/office/drawing/2014/main" id="{1B1DEAF4-3066-4C40-8B02-C73C2C7F2874}"/>
               </a:ext>
             </a:extLst>
           </p:cNvPr>
@@ -12669,7 +12677,7 @@
           <p:cNvPr id="19" name="">
             <a:extLst xmlns:a="http://schemas.openxmlformats.org/drawingml/2006/main">
               <a:ext uri="{FF2B5EF4-FFF2-40B4-BE49-F238E27FC236}">
-                <a16:creationId xmlns:a16="http://schemas.microsoft.com/office/drawing/2014/main" id="{C921E0F5-F8F5-4EB0-AB7A-49D10BCC71D6}"/>
+                <a16:creationId xmlns:a16="http://schemas.microsoft.com/office/drawing/2014/main" id="{2126C16A-6164-453B-88BA-C37E08FEBEC4}"/>
               </a:ext>
             </a:extLst>
           </p:cNvPr>
@@ -12701,7 +12709,7 @@
           <p:cNvPr id="20" name="">
             <a:extLst xmlns:a="http://schemas.openxmlformats.org/drawingml/2006/main">
               <a:ext uri="{FF2B5EF4-FFF2-40B4-BE49-F238E27FC236}">
-                <a16:creationId xmlns:a16="http://schemas.microsoft.com/office/drawing/2014/main" id="{CDF3EECD-8326-47EE-BDFC-FE8A68A19F32}"/>
+                <a16:creationId xmlns:a16="http://schemas.microsoft.com/office/drawing/2014/main" id="{C504F22B-E043-40F4-A15F-9552088CA8A2}"/>
               </a:ext>
             </a:extLst>
           </p:cNvPr>
@@ -12758,7 +12766,7 @@
           <p:cNvPr id="21" name="">
             <a:extLst xmlns:a="http://schemas.openxmlformats.org/drawingml/2006/main">
               <a:ext uri="{FF2B5EF4-FFF2-40B4-BE49-F238E27FC236}">
-                <a16:creationId xmlns:a16="http://schemas.microsoft.com/office/drawing/2014/main" id="{2716BA87-5761-4E07-84B5-C9ECC78F98DC}"/>
+                <a16:creationId xmlns:a16="http://schemas.microsoft.com/office/drawing/2014/main" id="{1C5C0224-8B77-41D4-9F33-FF276B593DF5}"/>
               </a:ext>
             </a:extLst>
           </p:cNvPr>
@@ -12815,7 +12823,7 @@
           <p:cNvPr id="22" name="">
             <a:extLst xmlns:a="http://schemas.openxmlformats.org/drawingml/2006/main">
               <a:ext uri="{FF2B5EF4-FFF2-40B4-BE49-F238E27FC236}">
-                <a16:creationId xmlns:a16="http://schemas.microsoft.com/office/drawing/2014/main" id="{F1FFF792-ACD7-41AB-A947-E59427CB68F7}"/>
+                <a16:creationId xmlns:a16="http://schemas.microsoft.com/office/drawing/2014/main" id="{F647170E-920D-4D1B-A33F-B3955BA08BAF}"/>
               </a:ext>
             </a:extLst>
           </p:cNvPr>
@@ -12870,7 +12878,7 @@
     </p:spTree>
     <p:extLst>
       <p:ext uri="{BB962C8B-B14F-4D97-AF65-F5344CB8AC3E}">
-        <p14:creationId xmlns:p14="http://schemas.microsoft.com/office/powerpoint/2010/main" val="593280691"/>
+        <p14:creationId xmlns:p14="http://schemas.microsoft.com/office/powerpoint/2010/main" val="707077594"/>
       </p:ext>
     </p:extLst>
   </p:cSld>
@@ -13071,7 +13079,7 @@
           <p:cNvPr id="22" name="">
             <a:extLst xmlns:a="http://schemas.openxmlformats.org/drawingml/2006/main">
               <a:ext uri="{FF2B5EF4-FFF2-40B4-BE49-F238E27FC236}">
-                <a16:creationId xmlns:a16="http://schemas.microsoft.com/office/drawing/2014/main" id="{79F02FF2-2BA1-4FBF-A687-0744ECBDFD18}"/>
+                <a16:creationId xmlns:a16="http://schemas.microsoft.com/office/drawing/2014/main" id="{889AF02E-FECC-4067-BBB9-5672B6ADFDF9}"/>
               </a:ext>
             </a:extLst>
           </p:cNvPr>
@@ -13103,7 +13111,7 @@
           <p:cNvPr id="2" name="">
             <a:extLst xmlns:a="http://schemas.openxmlformats.org/drawingml/2006/main">
               <a:ext uri="{FF2B5EF4-FFF2-40B4-BE49-F238E27FC236}">
-                <a16:creationId xmlns:a16="http://schemas.microsoft.com/office/drawing/2014/main" id="{12BD2AEE-780D-4D84-8543-0003AEB2A607}"/>
+                <a16:creationId xmlns:a16="http://schemas.microsoft.com/office/drawing/2014/main" id="{CE2C8DE3-D543-4C6C-8A9A-4FB58D4E60F2}"/>
               </a:ext>
             </a:extLst>
           </p:cNvPr>
@@ -13160,7 +13168,7 @@
           <p:cNvPr id="3" name="">
             <a:extLst xmlns:a="http://schemas.openxmlformats.org/drawingml/2006/main">
               <a:ext uri="{FF2B5EF4-FFF2-40B4-BE49-F238E27FC236}">
-                <a16:creationId xmlns:a16="http://schemas.microsoft.com/office/drawing/2014/main" id="{E657D1E8-8D35-41E0-9E28-9E39F8DDB343}"/>
+                <a16:creationId xmlns:a16="http://schemas.microsoft.com/office/drawing/2014/main" id="{C37AA32F-D43B-4376-AEBE-F8448FA4D871}"/>
               </a:ext>
             </a:extLst>
           </p:cNvPr>
@@ -13192,7 +13200,7 @@
           <p:cNvPr id="4" name="">
             <a:extLst xmlns:a="http://schemas.openxmlformats.org/drawingml/2006/main">
               <a:ext uri="{FF2B5EF4-FFF2-40B4-BE49-F238E27FC236}">
-                <a16:creationId xmlns:a16="http://schemas.microsoft.com/office/drawing/2014/main" id="{45BE24C1-A04D-413B-8216-DB146C7F580E}"/>
+                <a16:creationId xmlns:a16="http://schemas.microsoft.com/office/drawing/2014/main" id="{75148751-F6E1-440B-BCC1-F8F6AD8697A0}"/>
               </a:ext>
             </a:extLst>
           </p:cNvPr>
@@ -13249,7 +13257,7 @@
           <p:cNvPr id="5" name="">
             <a:extLst xmlns:a="http://schemas.openxmlformats.org/drawingml/2006/main">
               <a:ext uri="{FF2B5EF4-FFF2-40B4-BE49-F238E27FC236}">
-                <a16:creationId xmlns:a16="http://schemas.microsoft.com/office/drawing/2014/main" id="{C730D70E-FD1D-4EFD-8E2A-5CB099FFA4E8}"/>
+                <a16:creationId xmlns:a16="http://schemas.microsoft.com/office/drawing/2014/main" id="{17041DBC-DB37-40DF-B98B-93BAB37394B1}"/>
               </a:ext>
             </a:extLst>
           </p:cNvPr>
@@ -13306,7 +13314,7 @@
           <p:cNvPr id="6" name="">
             <a:extLst xmlns:a="http://schemas.openxmlformats.org/drawingml/2006/main">
               <a:ext uri="{FF2B5EF4-FFF2-40B4-BE49-F238E27FC236}">
-                <a16:creationId xmlns:a16="http://schemas.microsoft.com/office/drawing/2014/main" id="{E3E0FA5F-2C3A-48AC-8DA6-7051E0C4ACA5}"/>
+                <a16:creationId xmlns:a16="http://schemas.microsoft.com/office/drawing/2014/main" id="{8B2218EF-2BB7-4CDD-83DB-34A33091FECF}"/>
               </a:ext>
             </a:extLst>
           </p:cNvPr>
@@ -13363,7 +13371,7 @@
           <p:cNvPr id="7" name="">
             <a:extLst xmlns:a="http://schemas.openxmlformats.org/drawingml/2006/main">
               <a:ext uri="{FF2B5EF4-FFF2-40B4-BE49-F238E27FC236}">
-                <a16:creationId xmlns:a16="http://schemas.microsoft.com/office/drawing/2014/main" id="{FE8C0C34-11FC-493F-9969-1813DA1BA01C}"/>
+                <a16:creationId xmlns:a16="http://schemas.microsoft.com/office/drawing/2014/main" id="{6FA4697E-CEAB-4CC5-9C62-504D7F401AD0}"/>
               </a:ext>
             </a:extLst>
           </p:cNvPr>
@@ -13395,7 +13403,7 @@
           <p:cNvPr id="8" name="">
             <a:extLst xmlns:a="http://schemas.openxmlformats.org/drawingml/2006/main">
               <a:ext uri="{FF2B5EF4-FFF2-40B4-BE49-F238E27FC236}">
-                <a16:creationId xmlns:a16="http://schemas.microsoft.com/office/drawing/2014/main" id="{F9B9F7BC-1CC7-4507-9D47-456F307E8918}"/>
+                <a16:creationId xmlns:a16="http://schemas.microsoft.com/office/drawing/2014/main" id="{B90548D3-CDC8-49D0-81BE-BB67E42A7AF4}"/>
               </a:ext>
             </a:extLst>
           </p:cNvPr>
@@ -13452,7 +13460,7 @@
           <p:cNvPr id="9" name="">
             <a:extLst xmlns:a="http://schemas.openxmlformats.org/drawingml/2006/main">
               <a:ext uri="{FF2B5EF4-FFF2-40B4-BE49-F238E27FC236}">
-                <a16:creationId xmlns:a16="http://schemas.microsoft.com/office/drawing/2014/main" id="{B10ADBF8-5337-4274-B269-40808B15531D}"/>
+                <a16:creationId xmlns:a16="http://schemas.microsoft.com/office/drawing/2014/main" id="{68C57BFB-0D4F-4F50-B04D-DBA3D9537BCA}"/>
               </a:ext>
             </a:extLst>
           </p:cNvPr>
@@ -13509,7 +13517,7 @@
           <p:cNvPr id="10" name="">
             <a:extLst xmlns:a="http://schemas.openxmlformats.org/drawingml/2006/main">
               <a:ext uri="{FF2B5EF4-FFF2-40B4-BE49-F238E27FC236}">
-                <a16:creationId xmlns:a16="http://schemas.microsoft.com/office/drawing/2014/main" id="{DC078800-6343-4A98-A689-26DA54787D6C}"/>
+                <a16:creationId xmlns:a16="http://schemas.microsoft.com/office/drawing/2014/main" id="{DD52696A-2D3C-431D-9828-3CD21198DDBF}"/>
               </a:ext>
             </a:extLst>
           </p:cNvPr>
@@ -13543,7 +13551,7 @@
           <p:cNvPr id="11" name="">
             <a:extLst xmlns:a="http://schemas.openxmlformats.org/drawingml/2006/main">
               <a:ext uri="{FF2B5EF4-FFF2-40B4-BE49-F238E27FC236}">
-                <a16:creationId xmlns:a16="http://schemas.microsoft.com/office/drawing/2014/main" id="{6B01257F-C354-48EC-83C1-31ACF0DAB60C}"/>
+                <a16:creationId xmlns:a16="http://schemas.microsoft.com/office/drawing/2014/main" id="{D4ACA844-620D-4A40-A6F0-4BB3E03EE5BD}"/>
               </a:ext>
             </a:extLst>
           </p:cNvPr>
@@ -13575,7 +13583,7 @@
           <p:cNvPr id="12" name="">
             <a:extLst xmlns:a="http://schemas.openxmlformats.org/drawingml/2006/main">
               <a:ext uri="{FF2B5EF4-FFF2-40B4-BE49-F238E27FC236}">
-                <a16:creationId xmlns:a16="http://schemas.microsoft.com/office/drawing/2014/main" id="{E8A786FB-E1DD-4112-9D5E-69789D9BEF88}"/>
+                <a16:creationId xmlns:a16="http://schemas.microsoft.com/office/drawing/2014/main" id="{F54EE31C-A626-40EC-B64D-6BC44E114AC0}"/>
               </a:ext>
             </a:extLst>
           </p:cNvPr>
@@ -13632,7 +13640,7 @@
           <p:cNvPr id="13" name="">
             <a:extLst xmlns:a="http://schemas.openxmlformats.org/drawingml/2006/main">
               <a:ext uri="{FF2B5EF4-FFF2-40B4-BE49-F238E27FC236}">
-                <a16:creationId xmlns:a16="http://schemas.microsoft.com/office/drawing/2014/main" id="{DA715772-5142-4113-802B-7DFBCAF70745}"/>
+                <a16:creationId xmlns:a16="http://schemas.microsoft.com/office/drawing/2014/main" id="{6FB4FFF9-1A9E-43EE-A07E-E4380E213694}"/>
               </a:ext>
             </a:extLst>
           </p:cNvPr>
@@ -13689,7 +13697,7 @@
           <p:cNvPr id="14" name="">
             <a:extLst xmlns:a="http://schemas.openxmlformats.org/drawingml/2006/main">
               <a:ext uri="{FF2B5EF4-FFF2-40B4-BE49-F238E27FC236}">
-                <a16:creationId xmlns:a16="http://schemas.microsoft.com/office/drawing/2014/main" id="{A1F657E0-6313-4B05-8831-9A8372BB37E8}"/>
+                <a16:creationId xmlns:a16="http://schemas.microsoft.com/office/drawing/2014/main" id="{C78F51E4-8F83-4075-B11F-D3752A26CF97}"/>
               </a:ext>
             </a:extLst>
           </p:cNvPr>
@@ -13723,7 +13731,7 @@
           <p:cNvPr id="15" name="">
             <a:extLst xmlns:a="http://schemas.openxmlformats.org/drawingml/2006/main">
               <a:ext uri="{FF2B5EF4-FFF2-40B4-BE49-F238E27FC236}">
-                <a16:creationId xmlns:a16="http://schemas.microsoft.com/office/drawing/2014/main" id="{5CCF4463-9CAE-469E-ABE1-E024E781E2A2}"/>
+                <a16:creationId xmlns:a16="http://schemas.microsoft.com/office/drawing/2014/main" id="{BDD33CF9-8719-4B99-A70C-F5BC1259DAEC}"/>
               </a:ext>
             </a:extLst>
           </p:cNvPr>
@@ -13755,7 +13763,7 @@
           <p:cNvPr id="16" name="">
             <a:extLst xmlns:a="http://schemas.openxmlformats.org/drawingml/2006/main">
               <a:ext uri="{FF2B5EF4-FFF2-40B4-BE49-F238E27FC236}">
-                <a16:creationId xmlns:a16="http://schemas.microsoft.com/office/drawing/2014/main" id="{66E48372-6DC5-43B1-8B77-C8E3186196AE}"/>
+                <a16:creationId xmlns:a16="http://schemas.microsoft.com/office/drawing/2014/main" id="{D75FF373-42A3-4052-A8C7-5EE5453C826C}"/>
               </a:ext>
             </a:extLst>
           </p:cNvPr>
@@ -13812,7 +13820,7 @@
           <p:cNvPr id="17" name="">
             <a:extLst xmlns:a="http://schemas.openxmlformats.org/drawingml/2006/main">
               <a:ext uri="{FF2B5EF4-FFF2-40B4-BE49-F238E27FC236}">
-                <a16:creationId xmlns:a16="http://schemas.microsoft.com/office/drawing/2014/main" id="{63099098-7AC7-4AE1-8C96-45BD6DED29E7}"/>
+                <a16:creationId xmlns:a16="http://schemas.microsoft.com/office/drawing/2014/main" id="{366957A3-D9BC-4104-817C-F66339AC23D0}"/>
               </a:ext>
             </a:extLst>
           </p:cNvPr>
@@ -13869,7 +13877,7 @@
           <p:cNvPr id="18" name="">
             <a:extLst xmlns:a="http://schemas.openxmlformats.org/drawingml/2006/main">
               <a:ext uri="{FF2B5EF4-FFF2-40B4-BE49-F238E27FC236}">
-                <a16:creationId xmlns:a16="http://schemas.microsoft.com/office/drawing/2014/main" id="{B38428E5-2423-4FB8-AFB5-8806C5C7E5E1}"/>
+                <a16:creationId xmlns:a16="http://schemas.microsoft.com/office/drawing/2014/main" id="{9CCA5264-FA93-482B-9A2A-AE10D55140AC}"/>
               </a:ext>
             </a:extLst>
           </p:cNvPr>
@@ -13903,7 +13911,7 @@
           <p:cNvPr id="19" name="">
             <a:extLst xmlns:a="http://schemas.openxmlformats.org/drawingml/2006/main">
               <a:ext uri="{FF2B5EF4-FFF2-40B4-BE49-F238E27FC236}">
-                <a16:creationId xmlns:a16="http://schemas.microsoft.com/office/drawing/2014/main" id="{C99B333E-EC52-4DA1-B59C-3CB09B727BDA}"/>
+                <a16:creationId xmlns:a16="http://schemas.microsoft.com/office/drawing/2014/main" id="{10D28D9D-F011-4971-9E1B-43CBB3327EE5}"/>
               </a:ext>
             </a:extLst>
           </p:cNvPr>
@@ -13935,7 +13943,7 @@
           <p:cNvPr id="20" name="">
             <a:extLst xmlns:a="http://schemas.openxmlformats.org/drawingml/2006/main">
               <a:ext uri="{FF2B5EF4-FFF2-40B4-BE49-F238E27FC236}">
-                <a16:creationId xmlns:a16="http://schemas.microsoft.com/office/drawing/2014/main" id="{39615060-E50E-4499-9DA0-7B293E872738}"/>
+                <a16:creationId xmlns:a16="http://schemas.microsoft.com/office/drawing/2014/main" id="{42538BDB-F6F8-438D-8451-364D3656FB92}"/>
               </a:ext>
             </a:extLst>
           </p:cNvPr>
@@ -13992,7 +14000,7 @@
           <p:cNvPr id="21" name="">
             <a:extLst xmlns:a="http://schemas.openxmlformats.org/drawingml/2006/main">
               <a:ext uri="{FF2B5EF4-FFF2-40B4-BE49-F238E27FC236}">
-                <a16:creationId xmlns:a16="http://schemas.microsoft.com/office/drawing/2014/main" id="{7D43E366-E529-43A7-B747-E88EBD41BACA}"/>
+                <a16:creationId xmlns:a16="http://schemas.microsoft.com/office/drawing/2014/main" id="{2B7B3566-5DA3-4F69-A1AC-33A58339354E}"/>
               </a:ext>
             </a:extLst>
           </p:cNvPr>
@@ -14047,7 +14055,7 @@
     </p:spTree>
     <p:extLst>
       <p:ext uri="{BB962C8B-B14F-4D97-AF65-F5344CB8AC3E}">
-        <p14:creationId xmlns:p14="http://schemas.microsoft.com/office/powerpoint/2010/main" val="968976903"/>
+        <p14:creationId xmlns:p14="http://schemas.microsoft.com/office/powerpoint/2010/main" val="1200022123"/>
       </p:ext>
     </p:extLst>
   </p:cSld>
